--- a/docs/ibaraki-kouseihogo/職員給与規程案_説明資料案_2026-09.pptx
+++ b/docs/ibaraki-kouseihogo/職員給与規程案_説明資料案_2026-09.pptx
@@ -3462,9 +3462,33 @@
           </a:ln>
         </p:spPr>
       </p:sp>
-      <p:sp>
-        <p:nvSpPr>
-          <p:cNvPr id="4" name="Text 2"/>
+      <p:pic>
+        <p:nvPicPr>
+          <p:cNvPr id="4" name="Image 0" descr="preencoded.png">    </p:cNvPr>
+          <p:cNvPicPr>
+            <a:picLocks noChangeAspect="1"/>
+          </p:cNvPicPr>
+          <p:nvPr/>
+        </p:nvPicPr>
+        <p:blipFill>
+          <a:blip r:embed="rId1"/>
+          <a:stretch>
+            <a:fillRect/>
+          </a:stretch>
+        </p:blipFill>
+        <p:spPr>
+          <a:xfrm>
+            <a:off x="548640" y="411480"/>
+            <a:ext cx="731520" cy="859536"/>
+          </a:xfrm>
+          <a:prstGeom prst="rect">
+            <a:avLst/>
+          </a:prstGeom>
+        </p:spPr>
+      </p:pic>
+      <p:sp>
+        <p:nvSpPr>
+          <p:cNvPr id="5" name="Text 2"/>
           <p:cNvSpPr txBox="1"/>
           <p:nvPr/>
         </p:nvSpPr>
@@ -3505,7 +3529,7 @@
       </p:sp>
       <p:sp>
         <p:nvSpPr>
-          <p:cNvPr id="5" name="Text 3"/>
+          <p:cNvPr id="6" name="Text 3"/>
           <p:cNvSpPr txBox="1"/>
           <p:nvPr/>
         </p:nvSpPr>
@@ -3546,7 +3570,7 @@
       </p:sp>
       <p:sp>
         <p:nvSpPr>
-          <p:cNvPr id="6" name="Text 4"/>
+          <p:cNvPr id="7" name="Text 4"/>
           <p:cNvSpPr txBox="1"/>
           <p:nvPr/>
         </p:nvSpPr>
@@ -3587,7 +3611,7 @@
       </p:sp>
       <p:sp>
         <p:nvSpPr>
-          <p:cNvPr id="7" name="Text 5"/>
+          <p:cNvPr id="8" name="Text 5"/>
           <p:cNvSpPr txBox="1"/>
           <p:nvPr/>
         </p:nvSpPr>
@@ -3628,7 +3652,7 @@
       </p:sp>
       <p:sp>
         <p:nvSpPr>
-          <p:cNvPr id="8" name="Text 6"/>
+          <p:cNvPr id="9" name="Text 6"/>
           <p:cNvSpPr txBox="1"/>
           <p:nvPr/>
         </p:nvSpPr>
@@ -3669,7 +3693,7 @@
       </p:sp>
       <p:sp>
         <p:nvSpPr>
-          <p:cNvPr id="9" name="Text 7"/>
+          <p:cNvPr id="10" name="Text 7"/>
           <p:cNvSpPr txBox="1"/>
           <p:nvPr/>
         </p:nvSpPr>
@@ -3740,16 +3764,40 @@
           <a:chExt cx="0" cy="0"/>
         </a:xfrm>
       </p:grpSpPr>
-      <p:sp>
-        <p:nvSpPr>
-          <p:cNvPr id="2" name="Text 0"/>
+      <p:pic>
+        <p:nvPicPr>
+          <p:cNvPr id="2" name="Image 0" descr="preencoded.png">    </p:cNvPr>
+          <p:cNvPicPr>
+            <a:picLocks noChangeAspect="1"/>
+          </p:cNvPicPr>
+          <p:nvPr/>
+        </p:nvPicPr>
+        <p:blipFill>
+          <a:blip r:embed="rId1"/>
+          <a:stretch>
+            <a:fillRect/>
+          </a:stretch>
+        </p:blipFill>
+        <p:spPr>
+          <a:xfrm>
+            <a:off x="8211312" y="201168"/>
+            <a:ext cx="457200" cy="539496"/>
+          </a:xfrm>
+          <a:prstGeom prst="rect">
+            <a:avLst/>
+          </a:prstGeom>
+        </p:spPr>
+      </p:pic>
+      <p:sp>
+        <p:nvSpPr>
+          <p:cNvPr id="3" name="Text 0"/>
           <p:cNvSpPr txBox="1"/>
           <p:nvPr/>
         </p:nvSpPr>
         <p:spPr>
           <a:xfrm>
             <a:off x="457200" y="274320"/>
-            <a:ext cx="8229600" cy="548640"/>
+            <a:ext cx="7680960" cy="548640"/>
           </a:xfrm>
           <a:prstGeom prst="rect">
             <a:avLst/>
@@ -3783,7 +3831,7 @@
       </p:sp>
       <p:sp>
         <p:nvSpPr>
-          <p:cNvPr id="3" name="Text 1"/>
+          <p:cNvPr id="4" name="Text 1"/>
           <p:cNvSpPr txBox="1"/>
           <p:nvPr/>
         </p:nvSpPr>
@@ -3824,7 +3872,7 @@
       </p:sp>
       <p:sp>
         <p:nvSpPr>
-          <p:cNvPr id="4" name="Shape 2"/>
+          <p:cNvPr id="5" name="Shape 2"/>
           <p:cNvSpPr/>
           <p:nvPr/>
         </p:nvSpPr>
@@ -3851,7 +3899,7 @@
       </p:sp>
       <p:sp>
         <p:nvSpPr>
-          <p:cNvPr id="5" name="Shape 3"/>
+          <p:cNvPr id="6" name="Shape 3"/>
           <p:cNvSpPr/>
           <p:nvPr/>
         </p:nvSpPr>
@@ -3876,7 +3924,7 @@
       </p:sp>
       <p:sp>
         <p:nvSpPr>
-          <p:cNvPr id="6" name="Text 4"/>
+          <p:cNvPr id="7" name="Text 4"/>
           <p:cNvSpPr txBox="1"/>
           <p:nvPr/>
         </p:nvSpPr>
@@ -3917,7 +3965,7 @@
       </p:sp>
       <p:sp>
         <p:nvSpPr>
-          <p:cNvPr id="7" name="Text 5"/>
+          <p:cNvPr id="8" name="Text 5"/>
           <p:cNvSpPr txBox="1"/>
           <p:nvPr/>
         </p:nvSpPr>
@@ -3958,7 +4006,7 @@
       </p:sp>
       <p:sp>
         <p:nvSpPr>
-          <p:cNvPr id="8" name="Text 6"/>
+          <p:cNvPr id="9" name="Text 6"/>
           <p:cNvSpPr txBox="1"/>
           <p:nvPr/>
         </p:nvSpPr>
@@ -3999,7 +4047,7 @@
       </p:sp>
       <p:sp>
         <p:nvSpPr>
-          <p:cNvPr id="9" name="Shape 7"/>
+          <p:cNvPr id="10" name="Shape 7"/>
           <p:cNvSpPr/>
           <p:nvPr/>
         </p:nvSpPr>
@@ -4026,7 +4074,7 @@
       </p:sp>
       <p:sp>
         <p:nvSpPr>
-          <p:cNvPr id="10" name="Shape 8"/>
+          <p:cNvPr id="11" name="Shape 8"/>
           <p:cNvSpPr/>
           <p:nvPr/>
         </p:nvSpPr>
@@ -4051,7 +4099,7 @@
       </p:sp>
       <p:sp>
         <p:nvSpPr>
-          <p:cNvPr id="11" name="Text 9"/>
+          <p:cNvPr id="12" name="Text 9"/>
           <p:cNvSpPr txBox="1"/>
           <p:nvPr/>
         </p:nvSpPr>
@@ -4092,7 +4140,7 @@
       </p:sp>
       <p:sp>
         <p:nvSpPr>
-          <p:cNvPr id="12" name="Text 10"/>
+          <p:cNvPr id="13" name="Text 10"/>
           <p:cNvSpPr txBox="1"/>
           <p:nvPr/>
         </p:nvSpPr>
@@ -4133,7 +4181,7 @@
       </p:sp>
       <p:sp>
         <p:nvSpPr>
-          <p:cNvPr id="13" name="Text 11"/>
+          <p:cNvPr id="14" name="Text 11"/>
           <p:cNvSpPr txBox="1"/>
           <p:nvPr/>
         </p:nvSpPr>
@@ -4174,7 +4222,7 @@
       </p:sp>
       <p:sp>
         <p:nvSpPr>
-          <p:cNvPr id="14" name="Shape 12"/>
+          <p:cNvPr id="15" name="Shape 12"/>
           <p:cNvSpPr/>
           <p:nvPr/>
         </p:nvSpPr>
@@ -4201,7 +4249,7 @@
       </p:sp>
       <p:sp>
         <p:nvSpPr>
-          <p:cNvPr id="15" name="Shape 13"/>
+          <p:cNvPr id="16" name="Shape 13"/>
           <p:cNvSpPr/>
           <p:nvPr/>
         </p:nvSpPr>
@@ -4226,7 +4274,7 @@
       </p:sp>
       <p:sp>
         <p:nvSpPr>
-          <p:cNvPr id="16" name="Text 14"/>
+          <p:cNvPr id="17" name="Text 14"/>
           <p:cNvSpPr txBox="1"/>
           <p:nvPr/>
         </p:nvSpPr>
@@ -4267,7 +4315,7 @@
       </p:sp>
       <p:sp>
         <p:nvSpPr>
-          <p:cNvPr id="17" name="Text 15"/>
+          <p:cNvPr id="18" name="Text 15"/>
           <p:cNvSpPr txBox="1"/>
           <p:nvPr/>
         </p:nvSpPr>
@@ -4308,7 +4356,7 @@
       </p:sp>
       <p:sp>
         <p:nvSpPr>
-          <p:cNvPr id="18" name="Text 16"/>
+          <p:cNvPr id="19" name="Text 16"/>
           <p:cNvSpPr txBox="1"/>
           <p:nvPr/>
         </p:nvSpPr>
@@ -4349,7 +4397,7 @@
       </p:sp>
       <p:sp>
         <p:nvSpPr>
-          <p:cNvPr id="19" name="Shape 17"/>
+          <p:cNvPr id="20" name="Shape 17"/>
           <p:cNvSpPr/>
           <p:nvPr/>
         </p:nvSpPr>
@@ -4376,7 +4424,7 @@
       </p:sp>
       <p:sp>
         <p:nvSpPr>
-          <p:cNvPr id="20" name="Shape 18"/>
+          <p:cNvPr id="21" name="Shape 18"/>
           <p:cNvSpPr/>
           <p:nvPr/>
         </p:nvSpPr>
@@ -4401,7 +4449,7 @@
       </p:sp>
       <p:sp>
         <p:nvSpPr>
-          <p:cNvPr id="21" name="Text 19"/>
+          <p:cNvPr id="22" name="Text 19"/>
           <p:cNvSpPr txBox="1"/>
           <p:nvPr/>
         </p:nvSpPr>
@@ -4442,7 +4490,7 @@
       </p:sp>
       <p:sp>
         <p:nvSpPr>
-          <p:cNvPr id="22" name="Text 20"/>
+          <p:cNvPr id="23" name="Text 20"/>
           <p:cNvSpPr txBox="1"/>
           <p:nvPr/>
         </p:nvSpPr>
@@ -4483,7 +4531,7 @@
       </p:sp>
       <p:sp>
         <p:nvSpPr>
-          <p:cNvPr id="23" name="Text 21"/>
+          <p:cNvPr id="24" name="Text 21"/>
           <p:cNvSpPr txBox="1"/>
           <p:nvPr/>
         </p:nvSpPr>
@@ -4524,7 +4572,7 @@
       </p:sp>
       <p:sp>
         <p:nvSpPr>
-          <p:cNvPr id="24" name="Shape 22"/>
+          <p:cNvPr id="25" name="Shape 22"/>
           <p:cNvSpPr/>
           <p:nvPr/>
         </p:nvSpPr>
@@ -4551,7 +4599,7 @@
       </p:sp>
       <p:sp>
         <p:nvSpPr>
-          <p:cNvPr id="25" name="Shape 23"/>
+          <p:cNvPr id="26" name="Shape 23"/>
           <p:cNvSpPr/>
           <p:nvPr/>
         </p:nvSpPr>
@@ -4576,7 +4624,7 @@
       </p:sp>
       <p:sp>
         <p:nvSpPr>
-          <p:cNvPr id="26" name="Text 24"/>
+          <p:cNvPr id="27" name="Text 24"/>
           <p:cNvSpPr txBox="1"/>
           <p:nvPr/>
         </p:nvSpPr>
@@ -4617,7 +4665,7 @@
       </p:sp>
       <p:sp>
         <p:nvSpPr>
-          <p:cNvPr id="27" name="Text 25"/>
+          <p:cNvPr id="28" name="Text 25"/>
           <p:cNvSpPr txBox="1"/>
           <p:nvPr/>
         </p:nvSpPr>
@@ -4658,7 +4706,7 @@
       </p:sp>
       <p:sp>
         <p:nvSpPr>
-          <p:cNvPr id="28" name="Text 26"/>
+          <p:cNvPr id="29" name="Text 26"/>
           <p:cNvSpPr txBox="1"/>
           <p:nvPr/>
         </p:nvSpPr>
@@ -4699,7 +4747,7 @@
       </p:sp>
       <p:sp>
         <p:nvSpPr>
-          <p:cNvPr id="29" name="Shape 27"/>
+          <p:cNvPr id="30" name="Shape 27"/>
           <p:cNvSpPr/>
           <p:nvPr/>
         </p:nvSpPr>
@@ -4726,7 +4774,7 @@
       </p:sp>
       <p:sp>
         <p:nvSpPr>
-          <p:cNvPr id="30" name="Shape 28"/>
+          <p:cNvPr id="31" name="Shape 28"/>
           <p:cNvSpPr/>
           <p:nvPr/>
         </p:nvSpPr>
@@ -4751,7 +4799,7 @@
       </p:sp>
       <p:sp>
         <p:nvSpPr>
-          <p:cNvPr id="31" name="Text 29"/>
+          <p:cNvPr id="32" name="Text 29"/>
           <p:cNvSpPr txBox="1"/>
           <p:nvPr/>
         </p:nvSpPr>
@@ -4792,7 +4840,7 @@
       </p:sp>
       <p:sp>
         <p:nvSpPr>
-          <p:cNvPr id="32" name="Text 30"/>
+          <p:cNvPr id="33" name="Text 30"/>
           <p:cNvSpPr txBox="1"/>
           <p:nvPr/>
         </p:nvSpPr>
@@ -4833,7 +4881,7 @@
       </p:sp>
       <p:sp>
         <p:nvSpPr>
-          <p:cNvPr id="33" name="Text 31"/>
+          <p:cNvPr id="34" name="Text 31"/>
           <p:cNvSpPr txBox="1"/>
           <p:nvPr/>
         </p:nvSpPr>
@@ -4874,7 +4922,7 @@
       </p:sp>
       <p:sp>
         <p:nvSpPr>
-          <p:cNvPr id="34" name="Text 32"/>
+          <p:cNvPr id="35" name="Text 32"/>
           <p:cNvSpPr txBox="1"/>
           <p:nvPr/>
         </p:nvSpPr>
@@ -4915,7 +4963,7 @@
       </p:sp>
       <p:sp>
         <p:nvSpPr>
-          <p:cNvPr id="35" name="Text 33"/>
+          <p:cNvPr id="36" name="Text 33"/>
           <p:cNvSpPr txBox="1"/>
           <p:nvPr/>
         </p:nvSpPr>
@@ -4986,16 +5034,40 @@
           <a:chExt cx="0" cy="0"/>
         </a:xfrm>
       </p:grpSpPr>
-      <p:sp>
-        <p:nvSpPr>
-          <p:cNvPr id="2" name="Text 0"/>
+      <p:pic>
+        <p:nvPicPr>
+          <p:cNvPr id="2" name="Image 0" descr="preencoded.png">    </p:cNvPr>
+          <p:cNvPicPr>
+            <a:picLocks noChangeAspect="1"/>
+          </p:cNvPicPr>
+          <p:nvPr/>
+        </p:nvPicPr>
+        <p:blipFill>
+          <a:blip r:embed="rId1"/>
+          <a:stretch>
+            <a:fillRect/>
+          </a:stretch>
+        </p:blipFill>
+        <p:spPr>
+          <a:xfrm>
+            <a:off x="8211312" y="201168"/>
+            <a:ext cx="457200" cy="539496"/>
+          </a:xfrm>
+          <a:prstGeom prst="rect">
+            <a:avLst/>
+          </a:prstGeom>
+        </p:spPr>
+      </p:pic>
+      <p:sp>
+        <p:nvSpPr>
+          <p:cNvPr id="3" name="Text 0"/>
           <p:cNvSpPr txBox="1"/>
           <p:nvPr/>
         </p:nvSpPr>
         <p:spPr>
           <a:xfrm>
             <a:off x="457200" y="274320"/>
-            <a:ext cx="8229600" cy="548640"/>
+            <a:ext cx="7680960" cy="548640"/>
           </a:xfrm>
           <a:prstGeom prst="rect">
             <a:avLst/>
@@ -5029,7 +5101,7 @@
       </p:sp>
       <p:sp>
         <p:nvSpPr>
-          <p:cNvPr id="3" name="Text 1"/>
+          <p:cNvPr id="4" name="Text 1"/>
           <p:cNvSpPr txBox="1"/>
           <p:nvPr/>
         </p:nvSpPr>
@@ -7985,7 +8057,7 @@
       </p:graphicFrame>
       <p:sp>
         <p:nvSpPr>
-          <p:cNvPr id="5" name="Text 2"/>
+          <p:cNvPr id="6" name="Text 2"/>
           <p:cNvSpPr txBox="1"/>
           <p:nvPr/>
         </p:nvSpPr>
@@ -8026,7 +8098,7 @@
       </p:sp>
       <p:sp>
         <p:nvSpPr>
-          <p:cNvPr id="6" name="Text 3"/>
+          <p:cNvPr id="7" name="Text 3"/>
           <p:cNvSpPr txBox="1"/>
           <p:nvPr/>
         </p:nvSpPr>
@@ -8097,16 +8169,40 @@
           <a:chExt cx="0" cy="0"/>
         </a:xfrm>
       </p:grpSpPr>
-      <p:sp>
-        <p:nvSpPr>
-          <p:cNvPr id="2" name="Text 0"/>
+      <p:pic>
+        <p:nvPicPr>
+          <p:cNvPr id="2" name="Image 0" descr="preencoded.png">    </p:cNvPr>
+          <p:cNvPicPr>
+            <a:picLocks noChangeAspect="1"/>
+          </p:cNvPicPr>
+          <p:nvPr/>
+        </p:nvPicPr>
+        <p:blipFill>
+          <a:blip r:embed="rId1"/>
+          <a:stretch>
+            <a:fillRect/>
+          </a:stretch>
+        </p:blipFill>
+        <p:spPr>
+          <a:xfrm>
+            <a:off x="8211312" y="201168"/>
+            <a:ext cx="457200" cy="539496"/>
+          </a:xfrm>
+          <a:prstGeom prst="rect">
+            <a:avLst/>
+          </a:prstGeom>
+        </p:spPr>
+      </p:pic>
+      <p:sp>
+        <p:nvSpPr>
+          <p:cNvPr id="3" name="Text 0"/>
           <p:cNvSpPr txBox="1"/>
           <p:nvPr/>
         </p:nvSpPr>
         <p:spPr>
           <a:xfrm>
             <a:off x="457200" y="274320"/>
-            <a:ext cx="8229600" cy="548640"/>
+            <a:ext cx="7680960" cy="548640"/>
           </a:xfrm>
           <a:prstGeom prst="rect">
             <a:avLst/>
@@ -8140,7 +8236,7 @@
       </p:sp>
       <p:sp>
         <p:nvSpPr>
-          <p:cNvPr id="3" name="Text 1"/>
+          <p:cNvPr id="4" name="Text 1"/>
           <p:cNvSpPr txBox="1"/>
           <p:nvPr/>
         </p:nvSpPr>
@@ -8181,7 +8277,7 @@
       </p:sp>
       <p:sp>
         <p:nvSpPr>
-          <p:cNvPr id="4" name="Shape 2"/>
+          <p:cNvPr id="5" name="Shape 2"/>
           <p:cNvSpPr/>
           <p:nvPr/>
         </p:nvSpPr>
@@ -8208,7 +8304,7 @@
       </p:sp>
       <p:sp>
         <p:nvSpPr>
-          <p:cNvPr id="5" name="Text 3"/>
+          <p:cNvPr id="6" name="Text 3"/>
           <p:cNvSpPr txBox="1"/>
           <p:nvPr/>
         </p:nvSpPr>
@@ -8249,7 +8345,7 @@
       </p:sp>
       <p:sp>
         <p:nvSpPr>
-          <p:cNvPr id="6" name="Text 4"/>
+          <p:cNvPr id="7" name="Text 4"/>
           <p:cNvSpPr txBox="1"/>
           <p:nvPr/>
         </p:nvSpPr>
@@ -8290,7 +8386,7 @@
       </p:sp>
       <p:sp>
         <p:nvSpPr>
-          <p:cNvPr id="7" name="Text 5"/>
+          <p:cNvPr id="8" name="Text 5"/>
           <p:cNvSpPr txBox="1"/>
           <p:nvPr/>
         </p:nvSpPr>
@@ -8331,7 +8427,7 @@
       </p:sp>
       <p:sp>
         <p:nvSpPr>
-          <p:cNvPr id="8" name="Shape 6"/>
+          <p:cNvPr id="9" name="Shape 6"/>
           <p:cNvSpPr/>
           <p:nvPr/>
         </p:nvSpPr>
@@ -8358,7 +8454,7 @@
       </p:sp>
       <p:sp>
         <p:nvSpPr>
-          <p:cNvPr id="9" name="Text 7"/>
+          <p:cNvPr id="10" name="Text 7"/>
           <p:cNvSpPr txBox="1"/>
           <p:nvPr/>
         </p:nvSpPr>
@@ -8399,7 +8495,7 @@
       </p:sp>
       <p:sp>
         <p:nvSpPr>
-          <p:cNvPr id="10" name="Text 8"/>
+          <p:cNvPr id="11" name="Text 8"/>
           <p:cNvSpPr txBox="1"/>
           <p:nvPr/>
         </p:nvSpPr>
@@ -8440,7 +8536,7 @@
       </p:sp>
       <p:sp>
         <p:nvSpPr>
-          <p:cNvPr id="11" name="Text 9"/>
+          <p:cNvPr id="12" name="Text 9"/>
           <p:cNvSpPr txBox="1"/>
           <p:nvPr/>
         </p:nvSpPr>
@@ -8481,7 +8577,7 @@
       </p:sp>
       <p:sp>
         <p:nvSpPr>
-          <p:cNvPr id="12" name="Shape 10"/>
+          <p:cNvPr id="13" name="Shape 10"/>
           <p:cNvSpPr/>
           <p:nvPr/>
         </p:nvSpPr>
@@ -8508,7 +8604,7 @@
       </p:sp>
       <p:sp>
         <p:nvSpPr>
-          <p:cNvPr id="13" name="Text 11"/>
+          <p:cNvPr id="14" name="Text 11"/>
           <p:cNvSpPr txBox="1"/>
           <p:nvPr/>
         </p:nvSpPr>
@@ -8549,7 +8645,7 @@
       </p:sp>
       <p:sp>
         <p:nvSpPr>
-          <p:cNvPr id="14" name="Text 12"/>
+          <p:cNvPr id="15" name="Text 12"/>
           <p:cNvSpPr txBox="1"/>
           <p:nvPr/>
         </p:nvSpPr>
@@ -8590,7 +8686,7 @@
       </p:sp>
       <p:sp>
         <p:nvSpPr>
-          <p:cNvPr id="15" name="Text 13"/>
+          <p:cNvPr id="16" name="Text 13"/>
           <p:cNvSpPr txBox="1"/>
           <p:nvPr/>
         </p:nvSpPr>
@@ -8631,7 +8727,7 @@
       </p:sp>
       <p:sp>
         <p:nvSpPr>
-          <p:cNvPr id="16" name="Shape 14"/>
+          <p:cNvPr id="17" name="Shape 14"/>
           <p:cNvSpPr/>
           <p:nvPr/>
         </p:nvSpPr>
@@ -8658,7 +8754,7 @@
       </p:sp>
       <p:sp>
         <p:nvSpPr>
-          <p:cNvPr id="17" name="Text 15"/>
+          <p:cNvPr id="18" name="Text 15"/>
           <p:cNvSpPr txBox="1"/>
           <p:nvPr/>
         </p:nvSpPr>
@@ -8699,7 +8795,7 @@
       </p:sp>
       <p:sp>
         <p:nvSpPr>
-          <p:cNvPr id="18" name="Text 16"/>
+          <p:cNvPr id="19" name="Text 16"/>
           <p:cNvSpPr txBox="1"/>
           <p:nvPr/>
         </p:nvSpPr>
@@ -8740,7 +8836,7 @@
       </p:sp>
       <p:sp>
         <p:nvSpPr>
-          <p:cNvPr id="19" name="Text 17"/>
+          <p:cNvPr id="20" name="Text 17"/>
           <p:cNvSpPr txBox="1"/>
           <p:nvPr/>
         </p:nvSpPr>
@@ -8781,7 +8877,7 @@
       </p:sp>
       <p:sp>
         <p:nvSpPr>
-          <p:cNvPr id="20" name="Shape 18"/>
+          <p:cNvPr id="21" name="Shape 18"/>
           <p:cNvSpPr/>
           <p:nvPr/>
         </p:nvSpPr>
@@ -8808,7 +8904,7 @@
       </p:sp>
       <p:sp>
         <p:nvSpPr>
-          <p:cNvPr id="21" name="Text 19"/>
+          <p:cNvPr id="22" name="Text 19"/>
           <p:cNvSpPr txBox="1"/>
           <p:nvPr/>
         </p:nvSpPr>
@@ -8849,7 +8945,7 @@
       </p:sp>
       <p:sp>
         <p:nvSpPr>
-          <p:cNvPr id="22" name="Text 20"/>
+          <p:cNvPr id="23" name="Text 20"/>
           <p:cNvSpPr txBox="1"/>
           <p:nvPr/>
         </p:nvSpPr>
@@ -8890,7 +8986,7 @@
       </p:sp>
       <p:sp>
         <p:nvSpPr>
-          <p:cNvPr id="23" name="Text 21"/>
+          <p:cNvPr id="24" name="Text 21"/>
           <p:cNvSpPr txBox="1"/>
           <p:nvPr/>
         </p:nvSpPr>
@@ -8931,7 +9027,7 @@
       </p:sp>
       <p:sp>
         <p:nvSpPr>
-          <p:cNvPr id="24" name="Shape 22"/>
+          <p:cNvPr id="25" name="Shape 22"/>
           <p:cNvSpPr/>
           <p:nvPr/>
         </p:nvSpPr>
@@ -8958,7 +9054,7 @@
       </p:sp>
       <p:sp>
         <p:nvSpPr>
-          <p:cNvPr id="25" name="Text 23"/>
+          <p:cNvPr id="26" name="Text 23"/>
           <p:cNvSpPr txBox="1"/>
           <p:nvPr/>
         </p:nvSpPr>
@@ -9024,7 +9120,7 @@
       </p:sp>
       <p:sp>
         <p:nvSpPr>
-          <p:cNvPr id="26" name="Text 24"/>
+          <p:cNvPr id="27" name="Text 24"/>
           <p:cNvSpPr txBox="1"/>
           <p:nvPr/>
         </p:nvSpPr>
@@ -9095,16 +9191,40 @@
           <a:chExt cx="0" cy="0"/>
         </a:xfrm>
       </p:grpSpPr>
-      <p:sp>
-        <p:nvSpPr>
-          <p:cNvPr id="2" name="Text 0"/>
+      <p:pic>
+        <p:nvPicPr>
+          <p:cNvPr id="2" name="Image 0" descr="preencoded.png">    </p:cNvPr>
+          <p:cNvPicPr>
+            <a:picLocks noChangeAspect="1"/>
+          </p:cNvPicPr>
+          <p:nvPr/>
+        </p:nvPicPr>
+        <p:blipFill>
+          <a:blip r:embed="rId1"/>
+          <a:stretch>
+            <a:fillRect/>
+          </a:stretch>
+        </p:blipFill>
+        <p:spPr>
+          <a:xfrm>
+            <a:off x="8211312" y="201168"/>
+            <a:ext cx="457200" cy="539496"/>
+          </a:xfrm>
+          <a:prstGeom prst="rect">
+            <a:avLst/>
+          </a:prstGeom>
+        </p:spPr>
+      </p:pic>
+      <p:sp>
+        <p:nvSpPr>
+          <p:cNvPr id="3" name="Text 0"/>
           <p:cNvSpPr txBox="1"/>
           <p:nvPr/>
         </p:nvSpPr>
         <p:spPr>
           <a:xfrm>
             <a:off x="457200" y="274320"/>
-            <a:ext cx="8229600" cy="548640"/>
+            <a:ext cx="7680960" cy="548640"/>
           </a:xfrm>
           <a:prstGeom prst="rect">
             <a:avLst/>
@@ -9138,7 +9258,7 @@
       </p:sp>
       <p:sp>
         <p:nvSpPr>
-          <p:cNvPr id="3" name="Text 1"/>
+          <p:cNvPr id="4" name="Text 1"/>
           <p:cNvSpPr txBox="1"/>
           <p:nvPr/>
         </p:nvSpPr>
@@ -9179,7 +9299,7 @@
       </p:sp>
       <p:sp>
         <p:nvSpPr>
-          <p:cNvPr id="4" name="Shape 2"/>
+          <p:cNvPr id="5" name="Shape 2"/>
           <p:cNvSpPr/>
           <p:nvPr/>
         </p:nvSpPr>
@@ -9206,7 +9326,7 @@
       </p:sp>
       <p:sp>
         <p:nvSpPr>
-          <p:cNvPr id="5" name="Shape 3"/>
+          <p:cNvPr id="6" name="Shape 3"/>
           <p:cNvSpPr/>
           <p:nvPr/>
         </p:nvSpPr>
@@ -9233,7 +9353,7 @@
       </p:sp>
       <p:sp>
         <p:nvSpPr>
-          <p:cNvPr id="6" name="Text 4"/>
+          <p:cNvPr id="7" name="Text 4"/>
           <p:cNvSpPr txBox="1"/>
           <p:nvPr/>
         </p:nvSpPr>
@@ -9274,7 +9394,7 @@
       </p:sp>
       <p:sp>
         <p:nvSpPr>
-          <p:cNvPr id="7" name="Shape 5"/>
+          <p:cNvPr id="8" name="Shape 5"/>
           <p:cNvSpPr/>
           <p:nvPr/>
         </p:nvSpPr>
@@ -9301,7 +9421,7 @@
       </p:sp>
       <p:sp>
         <p:nvSpPr>
-          <p:cNvPr id="8" name="Shape 6"/>
+          <p:cNvPr id="9" name="Shape 6"/>
           <p:cNvSpPr/>
           <p:nvPr/>
         </p:nvSpPr>
@@ -9328,7 +9448,7 @@
       </p:sp>
       <p:sp>
         <p:nvSpPr>
-          <p:cNvPr id="9" name="Text 7"/>
+          <p:cNvPr id="10" name="Text 7"/>
           <p:cNvSpPr txBox="1"/>
           <p:nvPr/>
         </p:nvSpPr>
@@ -9369,7 +9489,7 @@
       </p:sp>
       <p:sp>
         <p:nvSpPr>
-          <p:cNvPr id="10" name="Shape 8"/>
+          <p:cNvPr id="11" name="Shape 8"/>
           <p:cNvSpPr/>
           <p:nvPr/>
         </p:nvSpPr>
@@ -9396,7 +9516,7 @@
       </p:sp>
       <p:sp>
         <p:nvSpPr>
-          <p:cNvPr id="11" name="Shape 9"/>
+          <p:cNvPr id="12" name="Shape 9"/>
           <p:cNvSpPr/>
           <p:nvPr/>
         </p:nvSpPr>
@@ -9423,7 +9543,7 @@
       </p:sp>
       <p:sp>
         <p:nvSpPr>
-          <p:cNvPr id="12" name="Text 10"/>
+          <p:cNvPr id="13" name="Text 10"/>
           <p:cNvSpPr txBox="1"/>
           <p:nvPr/>
         </p:nvSpPr>
@@ -9464,7 +9584,7 @@
       </p:sp>
       <p:sp>
         <p:nvSpPr>
-          <p:cNvPr id="13" name="Shape 11"/>
+          <p:cNvPr id="14" name="Shape 11"/>
           <p:cNvSpPr/>
           <p:nvPr/>
         </p:nvSpPr>
@@ -9491,7 +9611,7 @@
       </p:sp>
       <p:sp>
         <p:nvSpPr>
-          <p:cNvPr id="14" name="Shape 12"/>
+          <p:cNvPr id="15" name="Shape 12"/>
           <p:cNvSpPr/>
           <p:nvPr/>
         </p:nvSpPr>
@@ -9518,7 +9638,7 @@
       </p:sp>
       <p:sp>
         <p:nvSpPr>
-          <p:cNvPr id="15" name="Text 13"/>
+          <p:cNvPr id="16" name="Text 13"/>
           <p:cNvSpPr txBox="1"/>
           <p:nvPr/>
         </p:nvSpPr>
@@ -9559,7 +9679,7 @@
       </p:sp>
       <p:sp>
         <p:nvSpPr>
-          <p:cNvPr id="16" name="Shape 14"/>
+          <p:cNvPr id="17" name="Shape 14"/>
           <p:cNvSpPr/>
           <p:nvPr/>
         </p:nvSpPr>
@@ -9586,7 +9706,7 @@
       </p:sp>
       <p:sp>
         <p:nvSpPr>
-          <p:cNvPr id="17" name="Shape 15"/>
+          <p:cNvPr id="18" name="Shape 15"/>
           <p:cNvSpPr/>
           <p:nvPr/>
         </p:nvSpPr>
@@ -9613,7 +9733,7 @@
       </p:sp>
       <p:sp>
         <p:nvSpPr>
-          <p:cNvPr id="18" name="Text 16"/>
+          <p:cNvPr id="19" name="Text 16"/>
           <p:cNvSpPr txBox="1"/>
           <p:nvPr/>
         </p:nvSpPr>
@@ -9654,7 +9774,7 @@
       </p:sp>
       <p:sp>
         <p:nvSpPr>
-          <p:cNvPr id="19" name="Shape 17"/>
+          <p:cNvPr id="20" name="Shape 17"/>
           <p:cNvSpPr/>
           <p:nvPr/>
         </p:nvSpPr>
@@ -9681,7 +9801,7 @@
       </p:sp>
       <p:sp>
         <p:nvSpPr>
-          <p:cNvPr id="20" name="Shape 18"/>
+          <p:cNvPr id="21" name="Shape 18"/>
           <p:cNvSpPr/>
           <p:nvPr/>
         </p:nvSpPr>
@@ -9708,7 +9828,7 @@
       </p:sp>
       <p:sp>
         <p:nvSpPr>
-          <p:cNvPr id="21" name="Text 19"/>
+          <p:cNvPr id="22" name="Text 19"/>
           <p:cNvSpPr txBox="1"/>
           <p:nvPr/>
         </p:nvSpPr>
@@ -9749,7 +9869,7 @@
       </p:sp>
       <p:sp>
         <p:nvSpPr>
-          <p:cNvPr id="22" name="Shape 20"/>
+          <p:cNvPr id="23" name="Shape 20"/>
           <p:cNvSpPr/>
           <p:nvPr/>
         </p:nvSpPr>
@@ -9776,7 +9896,7 @@
       </p:sp>
       <p:sp>
         <p:nvSpPr>
-          <p:cNvPr id="23" name="Shape 21"/>
+          <p:cNvPr id="24" name="Shape 21"/>
           <p:cNvSpPr/>
           <p:nvPr/>
         </p:nvSpPr>
@@ -9803,7 +9923,7 @@
       </p:sp>
       <p:sp>
         <p:nvSpPr>
-          <p:cNvPr id="24" name="Text 22"/>
+          <p:cNvPr id="25" name="Text 22"/>
           <p:cNvSpPr txBox="1"/>
           <p:nvPr/>
         </p:nvSpPr>
@@ -9844,7 +9964,7 @@
       </p:sp>
       <p:sp>
         <p:nvSpPr>
-          <p:cNvPr id="25" name="Text 23"/>
+          <p:cNvPr id="26" name="Text 23"/>
           <p:cNvSpPr txBox="1"/>
           <p:nvPr/>
         </p:nvSpPr>
@@ -9915,16 +10035,40 @@
           <a:chExt cx="0" cy="0"/>
         </a:xfrm>
       </p:grpSpPr>
-      <p:sp>
-        <p:nvSpPr>
-          <p:cNvPr id="2" name="Text 0"/>
+      <p:pic>
+        <p:nvPicPr>
+          <p:cNvPr id="2" name="Image 0" descr="preencoded.png">    </p:cNvPr>
+          <p:cNvPicPr>
+            <a:picLocks noChangeAspect="1"/>
+          </p:cNvPicPr>
+          <p:nvPr/>
+        </p:nvPicPr>
+        <p:blipFill>
+          <a:blip r:embed="rId1"/>
+          <a:stretch>
+            <a:fillRect/>
+          </a:stretch>
+        </p:blipFill>
+        <p:spPr>
+          <a:xfrm>
+            <a:off x="8211312" y="201168"/>
+            <a:ext cx="457200" cy="539496"/>
+          </a:xfrm>
+          <a:prstGeom prst="rect">
+            <a:avLst/>
+          </a:prstGeom>
+        </p:spPr>
+      </p:pic>
+      <p:sp>
+        <p:nvSpPr>
+          <p:cNvPr id="3" name="Text 0"/>
           <p:cNvSpPr txBox="1"/>
           <p:nvPr/>
         </p:nvSpPr>
         <p:spPr>
           <a:xfrm>
             <a:off x="457200" y="274320"/>
-            <a:ext cx="8229600" cy="548640"/>
+            <a:ext cx="7680960" cy="548640"/>
           </a:xfrm>
           <a:prstGeom prst="rect">
             <a:avLst/>
@@ -9958,7 +10102,7 @@
       </p:sp>
       <p:sp>
         <p:nvSpPr>
-          <p:cNvPr id="3" name="Text 1"/>
+          <p:cNvPr id="4" name="Text 1"/>
           <p:cNvSpPr txBox="1"/>
           <p:nvPr/>
         </p:nvSpPr>
@@ -9999,7 +10143,7 @@
       </p:sp>
       <p:sp>
         <p:nvSpPr>
-          <p:cNvPr id="4" name="Shape 2"/>
+          <p:cNvPr id="5" name="Shape 2"/>
           <p:cNvSpPr/>
           <p:nvPr/>
         </p:nvSpPr>
@@ -10026,7 +10170,7 @@
       </p:sp>
       <p:sp>
         <p:nvSpPr>
-          <p:cNvPr id="5" name="Shape 3"/>
+          <p:cNvPr id="6" name="Shape 3"/>
           <p:cNvSpPr/>
           <p:nvPr/>
         </p:nvSpPr>
@@ -10051,7 +10195,7 @@
       </p:sp>
       <p:sp>
         <p:nvSpPr>
-          <p:cNvPr id="6" name="Text 4"/>
+          <p:cNvPr id="7" name="Text 4"/>
           <p:cNvSpPr txBox="1"/>
           <p:nvPr/>
         </p:nvSpPr>
@@ -10092,7 +10236,7 @@
       </p:sp>
       <p:sp>
         <p:nvSpPr>
-          <p:cNvPr id="7" name="Text 5"/>
+          <p:cNvPr id="8" name="Text 5"/>
           <p:cNvSpPr txBox="1"/>
           <p:nvPr/>
         </p:nvSpPr>
@@ -10133,7 +10277,7 @@
       </p:sp>
       <p:sp>
         <p:nvSpPr>
-          <p:cNvPr id="8" name="Text 6"/>
+          <p:cNvPr id="9" name="Text 6"/>
           <p:cNvSpPr txBox="1"/>
           <p:nvPr/>
         </p:nvSpPr>
@@ -10174,7 +10318,7 @@
       </p:sp>
       <p:sp>
         <p:nvSpPr>
-          <p:cNvPr id="9" name="Shape 7"/>
+          <p:cNvPr id="10" name="Shape 7"/>
           <p:cNvSpPr/>
           <p:nvPr/>
         </p:nvSpPr>
@@ -10201,7 +10345,7 @@
       </p:sp>
       <p:sp>
         <p:nvSpPr>
-          <p:cNvPr id="10" name="Shape 8"/>
+          <p:cNvPr id="11" name="Shape 8"/>
           <p:cNvSpPr/>
           <p:nvPr/>
         </p:nvSpPr>
@@ -10226,7 +10370,7 @@
       </p:sp>
       <p:sp>
         <p:nvSpPr>
-          <p:cNvPr id="11" name="Text 9"/>
+          <p:cNvPr id="12" name="Text 9"/>
           <p:cNvSpPr txBox="1"/>
           <p:nvPr/>
         </p:nvSpPr>
@@ -10267,7 +10411,7 @@
       </p:sp>
       <p:sp>
         <p:nvSpPr>
-          <p:cNvPr id="12" name="Text 10"/>
+          <p:cNvPr id="13" name="Text 10"/>
           <p:cNvSpPr txBox="1"/>
           <p:nvPr/>
         </p:nvSpPr>
@@ -10308,7 +10452,7 @@
       </p:sp>
       <p:sp>
         <p:nvSpPr>
-          <p:cNvPr id="13" name="Text 11"/>
+          <p:cNvPr id="14" name="Text 11"/>
           <p:cNvSpPr txBox="1"/>
           <p:nvPr/>
         </p:nvSpPr>
@@ -10349,7 +10493,7 @@
       </p:sp>
       <p:sp>
         <p:nvSpPr>
-          <p:cNvPr id="14" name="Shape 12"/>
+          <p:cNvPr id="15" name="Shape 12"/>
           <p:cNvSpPr/>
           <p:nvPr/>
         </p:nvSpPr>
@@ -10376,7 +10520,7 @@
       </p:sp>
       <p:sp>
         <p:nvSpPr>
-          <p:cNvPr id="15" name="Shape 13"/>
+          <p:cNvPr id="16" name="Shape 13"/>
           <p:cNvSpPr/>
           <p:nvPr/>
         </p:nvSpPr>
@@ -10401,7 +10545,7 @@
       </p:sp>
       <p:sp>
         <p:nvSpPr>
-          <p:cNvPr id="16" name="Text 14"/>
+          <p:cNvPr id="17" name="Text 14"/>
           <p:cNvSpPr txBox="1"/>
           <p:nvPr/>
         </p:nvSpPr>
@@ -10442,7 +10586,7 @@
       </p:sp>
       <p:sp>
         <p:nvSpPr>
-          <p:cNvPr id="17" name="Text 15"/>
+          <p:cNvPr id="18" name="Text 15"/>
           <p:cNvSpPr txBox="1"/>
           <p:nvPr/>
         </p:nvSpPr>
@@ -10483,7 +10627,7 @@
       </p:sp>
       <p:sp>
         <p:nvSpPr>
-          <p:cNvPr id="18" name="Text 16"/>
+          <p:cNvPr id="19" name="Text 16"/>
           <p:cNvSpPr txBox="1"/>
           <p:nvPr/>
         </p:nvSpPr>
@@ -10524,7 +10668,7 @@
       </p:sp>
       <p:sp>
         <p:nvSpPr>
-          <p:cNvPr id="19" name="Shape 17"/>
+          <p:cNvPr id="20" name="Shape 17"/>
           <p:cNvSpPr/>
           <p:nvPr/>
         </p:nvSpPr>
@@ -10551,7 +10695,7 @@
       </p:sp>
       <p:sp>
         <p:nvSpPr>
-          <p:cNvPr id="20" name="Shape 18"/>
+          <p:cNvPr id="21" name="Shape 18"/>
           <p:cNvSpPr/>
           <p:nvPr/>
         </p:nvSpPr>
@@ -10576,7 +10720,7 @@
       </p:sp>
       <p:sp>
         <p:nvSpPr>
-          <p:cNvPr id="21" name="Text 19"/>
+          <p:cNvPr id="22" name="Text 19"/>
           <p:cNvSpPr txBox="1"/>
           <p:nvPr/>
         </p:nvSpPr>
@@ -10617,7 +10761,7 @@
       </p:sp>
       <p:sp>
         <p:nvSpPr>
-          <p:cNvPr id="22" name="Text 20"/>
+          <p:cNvPr id="23" name="Text 20"/>
           <p:cNvSpPr txBox="1"/>
           <p:nvPr/>
         </p:nvSpPr>
@@ -10658,7 +10802,7 @@
       </p:sp>
       <p:sp>
         <p:nvSpPr>
-          <p:cNvPr id="23" name="Text 21"/>
+          <p:cNvPr id="24" name="Text 21"/>
           <p:cNvSpPr txBox="1"/>
           <p:nvPr/>
         </p:nvSpPr>
@@ -10699,7 +10843,7 @@
       </p:sp>
       <p:sp>
         <p:nvSpPr>
-          <p:cNvPr id="24" name="Shape 22"/>
+          <p:cNvPr id="25" name="Shape 22"/>
           <p:cNvSpPr/>
           <p:nvPr/>
         </p:nvSpPr>
@@ -10726,7 +10870,7 @@
       </p:sp>
       <p:sp>
         <p:nvSpPr>
-          <p:cNvPr id="25" name="Shape 23"/>
+          <p:cNvPr id="26" name="Shape 23"/>
           <p:cNvSpPr/>
           <p:nvPr/>
         </p:nvSpPr>
@@ -10751,7 +10895,7 @@
       </p:sp>
       <p:sp>
         <p:nvSpPr>
-          <p:cNvPr id="26" name="Text 24"/>
+          <p:cNvPr id="27" name="Text 24"/>
           <p:cNvSpPr txBox="1"/>
           <p:nvPr/>
         </p:nvSpPr>
@@ -10792,7 +10936,7 @@
       </p:sp>
       <p:sp>
         <p:nvSpPr>
-          <p:cNvPr id="27" name="Text 25"/>
+          <p:cNvPr id="28" name="Text 25"/>
           <p:cNvSpPr txBox="1"/>
           <p:nvPr/>
         </p:nvSpPr>
@@ -10833,7 +10977,7 @@
       </p:sp>
       <p:sp>
         <p:nvSpPr>
-          <p:cNvPr id="28" name="Text 26"/>
+          <p:cNvPr id="29" name="Text 26"/>
           <p:cNvSpPr txBox="1"/>
           <p:nvPr/>
         </p:nvSpPr>
@@ -10874,7 +11018,7 @@
       </p:sp>
       <p:sp>
         <p:nvSpPr>
-          <p:cNvPr id="29" name="Shape 27"/>
+          <p:cNvPr id="30" name="Shape 27"/>
           <p:cNvSpPr/>
           <p:nvPr/>
         </p:nvSpPr>
@@ -10901,7 +11045,7 @@
       </p:sp>
       <p:sp>
         <p:nvSpPr>
-          <p:cNvPr id="30" name="Shape 28"/>
+          <p:cNvPr id="31" name="Shape 28"/>
           <p:cNvSpPr/>
           <p:nvPr/>
         </p:nvSpPr>
@@ -10926,7 +11070,7 @@
       </p:sp>
       <p:sp>
         <p:nvSpPr>
-          <p:cNvPr id="31" name="Text 29"/>
+          <p:cNvPr id="32" name="Text 29"/>
           <p:cNvSpPr txBox="1"/>
           <p:nvPr/>
         </p:nvSpPr>
@@ -10967,7 +11111,7 @@
       </p:sp>
       <p:sp>
         <p:nvSpPr>
-          <p:cNvPr id="32" name="Text 30"/>
+          <p:cNvPr id="33" name="Text 30"/>
           <p:cNvSpPr txBox="1"/>
           <p:nvPr/>
         </p:nvSpPr>
@@ -11008,7 +11152,7 @@
       </p:sp>
       <p:sp>
         <p:nvSpPr>
-          <p:cNvPr id="33" name="Text 31"/>
+          <p:cNvPr id="34" name="Text 31"/>
           <p:cNvSpPr txBox="1"/>
           <p:nvPr/>
         </p:nvSpPr>
@@ -11049,7 +11193,7 @@
       </p:sp>
       <p:sp>
         <p:nvSpPr>
-          <p:cNvPr id="34" name="Text 32"/>
+          <p:cNvPr id="35" name="Text 32"/>
           <p:cNvSpPr txBox="1"/>
           <p:nvPr/>
         </p:nvSpPr>
@@ -11120,16 +11264,40 @@
           <a:chExt cx="0" cy="0"/>
         </a:xfrm>
       </p:grpSpPr>
-      <p:sp>
-        <p:nvSpPr>
-          <p:cNvPr id="2" name="Text 0"/>
+      <p:pic>
+        <p:nvPicPr>
+          <p:cNvPr id="2" name="Image 0" descr="preencoded.png">    </p:cNvPr>
+          <p:cNvPicPr>
+            <a:picLocks noChangeAspect="1"/>
+          </p:cNvPicPr>
+          <p:nvPr/>
+        </p:nvPicPr>
+        <p:blipFill>
+          <a:blip r:embed="rId1"/>
+          <a:stretch>
+            <a:fillRect/>
+          </a:stretch>
+        </p:blipFill>
+        <p:spPr>
+          <a:xfrm>
+            <a:off x="8211312" y="201168"/>
+            <a:ext cx="457200" cy="539496"/>
+          </a:xfrm>
+          <a:prstGeom prst="rect">
+            <a:avLst/>
+          </a:prstGeom>
+        </p:spPr>
+      </p:pic>
+      <p:sp>
+        <p:nvSpPr>
+          <p:cNvPr id="3" name="Text 0"/>
           <p:cNvSpPr txBox="1"/>
           <p:nvPr/>
         </p:nvSpPr>
         <p:spPr>
           <a:xfrm>
             <a:off x="457200" y="274320"/>
-            <a:ext cx="8229600" cy="548640"/>
+            <a:ext cx="7680960" cy="548640"/>
           </a:xfrm>
           <a:prstGeom prst="rect">
             <a:avLst/>
@@ -13254,7 +13422,7 @@
       </p:graphicFrame>
       <p:sp>
         <p:nvSpPr>
-          <p:cNvPr id="4" name="Text 1"/>
+          <p:cNvPr id="5" name="Text 1"/>
           <p:cNvSpPr txBox="1"/>
           <p:nvPr/>
         </p:nvSpPr>
@@ -13325,16 +13493,40 @@
           <a:chExt cx="0" cy="0"/>
         </a:xfrm>
       </p:grpSpPr>
-      <p:sp>
-        <p:nvSpPr>
-          <p:cNvPr id="2" name="Text 0"/>
+      <p:pic>
+        <p:nvPicPr>
+          <p:cNvPr id="2" name="Image 0" descr="preencoded.png">    </p:cNvPr>
+          <p:cNvPicPr>
+            <a:picLocks noChangeAspect="1"/>
+          </p:cNvPicPr>
+          <p:nvPr/>
+        </p:nvPicPr>
+        <p:blipFill>
+          <a:blip r:embed="rId1"/>
+          <a:stretch>
+            <a:fillRect/>
+          </a:stretch>
+        </p:blipFill>
+        <p:spPr>
+          <a:xfrm>
+            <a:off x="8211312" y="201168"/>
+            <a:ext cx="457200" cy="539496"/>
+          </a:xfrm>
+          <a:prstGeom prst="rect">
+            <a:avLst/>
+          </a:prstGeom>
+        </p:spPr>
+      </p:pic>
+      <p:sp>
+        <p:nvSpPr>
+          <p:cNvPr id="3" name="Text 0"/>
           <p:cNvSpPr txBox="1"/>
           <p:nvPr/>
         </p:nvSpPr>
         <p:spPr>
           <a:xfrm>
             <a:off x="457200" y="274320"/>
-            <a:ext cx="8229600" cy="548640"/>
+            <a:ext cx="7680960" cy="548640"/>
           </a:xfrm>
           <a:prstGeom prst="rect">
             <a:avLst/>
@@ -13368,7 +13560,7 @@
       </p:sp>
       <p:sp>
         <p:nvSpPr>
-          <p:cNvPr id="3" name="Text 1"/>
+          <p:cNvPr id="4" name="Text 1"/>
           <p:cNvSpPr txBox="1"/>
           <p:nvPr/>
         </p:nvSpPr>
@@ -13409,7 +13601,7 @@
       </p:sp>
       <p:sp>
         <p:nvSpPr>
-          <p:cNvPr id="4" name="Shape 2"/>
+          <p:cNvPr id="5" name="Shape 2"/>
           <p:cNvSpPr/>
           <p:nvPr/>
         </p:nvSpPr>
@@ -13436,7 +13628,7 @@
       </p:sp>
       <p:sp>
         <p:nvSpPr>
-          <p:cNvPr id="5" name="Shape 3"/>
+          <p:cNvPr id="6" name="Shape 3"/>
           <p:cNvSpPr/>
           <p:nvPr/>
         </p:nvSpPr>
@@ -13461,7 +13653,7 @@
       </p:sp>
       <p:sp>
         <p:nvSpPr>
-          <p:cNvPr id="6" name="Text 4"/>
+          <p:cNvPr id="7" name="Text 4"/>
           <p:cNvSpPr txBox="1"/>
           <p:nvPr/>
         </p:nvSpPr>
@@ -13502,7 +13694,7 @@
       </p:sp>
       <p:sp>
         <p:nvSpPr>
-          <p:cNvPr id="7" name="Text 5"/>
+          <p:cNvPr id="8" name="Text 5"/>
           <p:cNvSpPr txBox="1"/>
           <p:nvPr/>
         </p:nvSpPr>
@@ -13543,7 +13735,7 @@
       </p:sp>
       <p:sp>
         <p:nvSpPr>
-          <p:cNvPr id="8" name="Text 6"/>
+          <p:cNvPr id="9" name="Text 6"/>
           <p:cNvSpPr txBox="1"/>
           <p:nvPr/>
         </p:nvSpPr>
@@ -13584,7 +13776,7 @@
       </p:sp>
       <p:sp>
         <p:nvSpPr>
-          <p:cNvPr id="9" name="Shape 7"/>
+          <p:cNvPr id="10" name="Shape 7"/>
           <p:cNvSpPr/>
           <p:nvPr/>
         </p:nvSpPr>
@@ -13611,7 +13803,7 @@
       </p:sp>
       <p:sp>
         <p:nvSpPr>
-          <p:cNvPr id="10" name="Shape 8"/>
+          <p:cNvPr id="11" name="Shape 8"/>
           <p:cNvSpPr/>
           <p:nvPr/>
         </p:nvSpPr>
@@ -13636,7 +13828,7 @@
       </p:sp>
       <p:sp>
         <p:nvSpPr>
-          <p:cNvPr id="11" name="Text 9"/>
+          <p:cNvPr id="12" name="Text 9"/>
           <p:cNvSpPr txBox="1"/>
           <p:nvPr/>
         </p:nvSpPr>
@@ -13677,7 +13869,7 @@
       </p:sp>
       <p:sp>
         <p:nvSpPr>
-          <p:cNvPr id="12" name="Text 10"/>
+          <p:cNvPr id="13" name="Text 10"/>
           <p:cNvSpPr txBox="1"/>
           <p:nvPr/>
         </p:nvSpPr>
@@ -13718,7 +13910,7 @@
       </p:sp>
       <p:sp>
         <p:nvSpPr>
-          <p:cNvPr id="13" name="Text 11"/>
+          <p:cNvPr id="14" name="Text 11"/>
           <p:cNvSpPr txBox="1"/>
           <p:nvPr/>
         </p:nvSpPr>
@@ -13759,7 +13951,7 @@
       </p:sp>
       <p:sp>
         <p:nvSpPr>
-          <p:cNvPr id="14" name="Shape 12"/>
+          <p:cNvPr id="15" name="Shape 12"/>
           <p:cNvSpPr/>
           <p:nvPr/>
         </p:nvSpPr>
@@ -13786,7 +13978,7 @@
       </p:sp>
       <p:sp>
         <p:nvSpPr>
-          <p:cNvPr id="15" name="Shape 13"/>
+          <p:cNvPr id="16" name="Shape 13"/>
           <p:cNvSpPr/>
           <p:nvPr/>
         </p:nvSpPr>
@@ -13811,7 +14003,7 @@
       </p:sp>
       <p:sp>
         <p:nvSpPr>
-          <p:cNvPr id="16" name="Text 14"/>
+          <p:cNvPr id="17" name="Text 14"/>
           <p:cNvSpPr txBox="1"/>
           <p:nvPr/>
         </p:nvSpPr>
@@ -13852,7 +14044,7 @@
       </p:sp>
       <p:sp>
         <p:nvSpPr>
-          <p:cNvPr id="17" name="Text 15"/>
+          <p:cNvPr id="18" name="Text 15"/>
           <p:cNvSpPr txBox="1"/>
           <p:nvPr/>
         </p:nvSpPr>
@@ -13893,7 +14085,7 @@
       </p:sp>
       <p:sp>
         <p:nvSpPr>
-          <p:cNvPr id="18" name="Text 16"/>
+          <p:cNvPr id="19" name="Text 16"/>
           <p:cNvSpPr txBox="1"/>
           <p:nvPr/>
         </p:nvSpPr>
@@ -13934,7 +14126,7 @@
       </p:sp>
       <p:sp>
         <p:nvSpPr>
-          <p:cNvPr id="19" name="Text 17"/>
+          <p:cNvPr id="20" name="Text 17"/>
           <p:cNvSpPr txBox="1"/>
           <p:nvPr/>
         </p:nvSpPr>
@@ -14005,16 +14197,40 @@
           <a:chExt cx="0" cy="0"/>
         </a:xfrm>
       </p:grpSpPr>
-      <p:sp>
-        <p:nvSpPr>
-          <p:cNvPr id="2" name="Text 0"/>
+      <p:pic>
+        <p:nvPicPr>
+          <p:cNvPr id="2" name="Image 0" descr="preencoded.png">    </p:cNvPr>
+          <p:cNvPicPr>
+            <a:picLocks noChangeAspect="1"/>
+          </p:cNvPicPr>
+          <p:nvPr/>
+        </p:nvPicPr>
+        <p:blipFill>
+          <a:blip r:embed="rId1"/>
+          <a:stretch>
+            <a:fillRect/>
+          </a:stretch>
+        </p:blipFill>
+        <p:spPr>
+          <a:xfrm>
+            <a:off x="8211312" y="201168"/>
+            <a:ext cx="457200" cy="539496"/>
+          </a:xfrm>
+          <a:prstGeom prst="rect">
+            <a:avLst/>
+          </a:prstGeom>
+        </p:spPr>
+      </p:pic>
+      <p:sp>
+        <p:nvSpPr>
+          <p:cNvPr id="3" name="Text 0"/>
           <p:cNvSpPr txBox="1"/>
           <p:nvPr/>
         </p:nvSpPr>
         <p:spPr>
           <a:xfrm>
             <a:off x="457200" y="274320"/>
-            <a:ext cx="8229600" cy="548640"/>
+            <a:ext cx="7680960" cy="548640"/>
           </a:xfrm>
           <a:prstGeom prst="rect">
             <a:avLst/>
@@ -14048,7 +14264,7 @@
       </p:sp>
       <p:sp>
         <p:nvSpPr>
-          <p:cNvPr id="3" name="Text 1"/>
+          <p:cNvPr id="4" name="Text 1"/>
           <p:cNvSpPr txBox="1"/>
           <p:nvPr/>
         </p:nvSpPr>
@@ -14089,7 +14305,7 @@
       </p:sp>
       <p:sp>
         <p:nvSpPr>
-          <p:cNvPr id="4" name="Shape 2"/>
+          <p:cNvPr id="5" name="Shape 2"/>
           <p:cNvSpPr/>
           <p:nvPr/>
         </p:nvSpPr>
@@ -14116,7 +14332,7 @@
       </p:sp>
       <p:sp>
         <p:nvSpPr>
-          <p:cNvPr id="5" name="Shape 3"/>
+          <p:cNvPr id="6" name="Shape 3"/>
           <p:cNvSpPr/>
           <p:nvPr/>
         </p:nvSpPr>
@@ -14141,7 +14357,7 @@
       </p:sp>
       <p:sp>
         <p:nvSpPr>
-          <p:cNvPr id="6" name="Text 4"/>
+          <p:cNvPr id="7" name="Text 4"/>
           <p:cNvSpPr txBox="1"/>
           <p:nvPr/>
         </p:nvSpPr>
@@ -14182,7 +14398,7 @@
       </p:sp>
       <p:sp>
         <p:nvSpPr>
-          <p:cNvPr id="7" name="Text 5"/>
+          <p:cNvPr id="8" name="Text 5"/>
           <p:cNvSpPr txBox="1"/>
           <p:nvPr/>
         </p:nvSpPr>
@@ -14223,7 +14439,7 @@
       </p:sp>
       <p:sp>
         <p:nvSpPr>
-          <p:cNvPr id="8" name="Text 6"/>
+          <p:cNvPr id="9" name="Text 6"/>
           <p:cNvSpPr txBox="1"/>
           <p:nvPr/>
         </p:nvSpPr>
@@ -14264,7 +14480,7 @@
       </p:sp>
       <p:sp>
         <p:nvSpPr>
-          <p:cNvPr id="9" name="Shape 7"/>
+          <p:cNvPr id="10" name="Shape 7"/>
           <p:cNvSpPr/>
           <p:nvPr/>
         </p:nvSpPr>
@@ -14291,7 +14507,7 @@
       </p:sp>
       <p:sp>
         <p:nvSpPr>
-          <p:cNvPr id="10" name="Shape 8"/>
+          <p:cNvPr id="11" name="Shape 8"/>
           <p:cNvSpPr/>
           <p:nvPr/>
         </p:nvSpPr>
@@ -14316,7 +14532,7 @@
       </p:sp>
       <p:sp>
         <p:nvSpPr>
-          <p:cNvPr id="11" name="Text 9"/>
+          <p:cNvPr id="12" name="Text 9"/>
           <p:cNvSpPr txBox="1"/>
           <p:nvPr/>
         </p:nvSpPr>
@@ -14357,7 +14573,7 @@
       </p:sp>
       <p:sp>
         <p:nvSpPr>
-          <p:cNvPr id="12" name="Text 10"/>
+          <p:cNvPr id="13" name="Text 10"/>
           <p:cNvSpPr txBox="1"/>
           <p:nvPr/>
         </p:nvSpPr>
@@ -14398,7 +14614,7 @@
       </p:sp>
       <p:sp>
         <p:nvSpPr>
-          <p:cNvPr id="13" name="Text 11"/>
+          <p:cNvPr id="14" name="Text 11"/>
           <p:cNvSpPr txBox="1"/>
           <p:nvPr/>
         </p:nvSpPr>
@@ -14439,7 +14655,7 @@
       </p:sp>
       <p:sp>
         <p:nvSpPr>
-          <p:cNvPr id="14" name="Shape 12"/>
+          <p:cNvPr id="15" name="Shape 12"/>
           <p:cNvSpPr/>
           <p:nvPr/>
         </p:nvSpPr>
@@ -14466,7 +14682,7 @@
       </p:sp>
       <p:sp>
         <p:nvSpPr>
-          <p:cNvPr id="15" name="Shape 13"/>
+          <p:cNvPr id="16" name="Shape 13"/>
           <p:cNvSpPr/>
           <p:nvPr/>
         </p:nvSpPr>
@@ -14491,7 +14707,7 @@
       </p:sp>
       <p:sp>
         <p:nvSpPr>
-          <p:cNvPr id="16" name="Text 14"/>
+          <p:cNvPr id="17" name="Text 14"/>
           <p:cNvSpPr txBox="1"/>
           <p:nvPr/>
         </p:nvSpPr>
@@ -14532,7 +14748,7 @@
       </p:sp>
       <p:sp>
         <p:nvSpPr>
-          <p:cNvPr id="17" name="Text 15"/>
+          <p:cNvPr id="18" name="Text 15"/>
           <p:cNvSpPr txBox="1"/>
           <p:nvPr/>
         </p:nvSpPr>
@@ -14573,7 +14789,7 @@
       </p:sp>
       <p:sp>
         <p:nvSpPr>
-          <p:cNvPr id="18" name="Text 16"/>
+          <p:cNvPr id="19" name="Text 16"/>
           <p:cNvSpPr txBox="1"/>
           <p:nvPr/>
         </p:nvSpPr>
@@ -14614,7 +14830,7 @@
       </p:sp>
       <p:sp>
         <p:nvSpPr>
-          <p:cNvPr id="19" name="Shape 17"/>
+          <p:cNvPr id="20" name="Shape 17"/>
           <p:cNvSpPr/>
           <p:nvPr/>
         </p:nvSpPr>
@@ -14641,7 +14857,7 @@
       </p:sp>
       <p:sp>
         <p:nvSpPr>
-          <p:cNvPr id="20" name="Shape 18"/>
+          <p:cNvPr id="21" name="Shape 18"/>
           <p:cNvSpPr/>
           <p:nvPr/>
         </p:nvSpPr>
@@ -14666,7 +14882,7 @@
       </p:sp>
       <p:sp>
         <p:nvSpPr>
-          <p:cNvPr id="21" name="Text 19"/>
+          <p:cNvPr id="22" name="Text 19"/>
           <p:cNvSpPr txBox="1"/>
           <p:nvPr/>
         </p:nvSpPr>
@@ -14707,7 +14923,7 @@
       </p:sp>
       <p:sp>
         <p:nvSpPr>
-          <p:cNvPr id="22" name="Text 20"/>
+          <p:cNvPr id="23" name="Text 20"/>
           <p:cNvSpPr txBox="1"/>
           <p:nvPr/>
         </p:nvSpPr>
@@ -14748,7 +14964,7 @@
       </p:sp>
       <p:sp>
         <p:nvSpPr>
-          <p:cNvPr id="23" name="Text 21"/>
+          <p:cNvPr id="24" name="Text 21"/>
           <p:cNvSpPr txBox="1"/>
           <p:nvPr/>
         </p:nvSpPr>
@@ -14789,7 +15005,7 @@
       </p:sp>
       <p:sp>
         <p:nvSpPr>
-          <p:cNvPr id="24" name="Shape 22"/>
+          <p:cNvPr id="25" name="Shape 22"/>
           <p:cNvSpPr/>
           <p:nvPr/>
         </p:nvSpPr>
@@ -14816,7 +15032,7 @@
       </p:sp>
       <p:sp>
         <p:nvSpPr>
-          <p:cNvPr id="25" name="Shape 23"/>
+          <p:cNvPr id="26" name="Shape 23"/>
           <p:cNvSpPr/>
           <p:nvPr/>
         </p:nvSpPr>
@@ -14841,7 +15057,7 @@
       </p:sp>
       <p:sp>
         <p:nvSpPr>
-          <p:cNvPr id="26" name="Text 24"/>
+          <p:cNvPr id="27" name="Text 24"/>
           <p:cNvSpPr txBox="1"/>
           <p:nvPr/>
         </p:nvSpPr>
@@ -14882,7 +15098,7 @@
       </p:sp>
       <p:sp>
         <p:nvSpPr>
-          <p:cNvPr id="27" name="Text 25"/>
+          <p:cNvPr id="28" name="Text 25"/>
           <p:cNvSpPr txBox="1"/>
           <p:nvPr/>
         </p:nvSpPr>
@@ -14923,7 +15139,7 @@
       </p:sp>
       <p:sp>
         <p:nvSpPr>
-          <p:cNvPr id="28" name="Text 26"/>
+          <p:cNvPr id="29" name="Text 26"/>
           <p:cNvSpPr txBox="1"/>
           <p:nvPr/>
         </p:nvSpPr>
@@ -14964,7 +15180,7 @@
       </p:sp>
       <p:sp>
         <p:nvSpPr>
-          <p:cNvPr id="29" name="Shape 27"/>
+          <p:cNvPr id="30" name="Shape 27"/>
           <p:cNvSpPr/>
           <p:nvPr/>
         </p:nvSpPr>
@@ -14991,7 +15207,7 @@
       </p:sp>
       <p:sp>
         <p:nvSpPr>
-          <p:cNvPr id="30" name="Shape 28"/>
+          <p:cNvPr id="31" name="Shape 28"/>
           <p:cNvSpPr/>
           <p:nvPr/>
         </p:nvSpPr>
@@ -15016,7 +15232,7 @@
       </p:sp>
       <p:sp>
         <p:nvSpPr>
-          <p:cNvPr id="31" name="Text 29"/>
+          <p:cNvPr id="32" name="Text 29"/>
           <p:cNvSpPr txBox="1"/>
           <p:nvPr/>
         </p:nvSpPr>
@@ -15057,7 +15273,7 @@
       </p:sp>
       <p:sp>
         <p:nvSpPr>
-          <p:cNvPr id="32" name="Text 30"/>
+          <p:cNvPr id="33" name="Text 30"/>
           <p:cNvSpPr txBox="1"/>
           <p:nvPr/>
         </p:nvSpPr>
@@ -15098,7 +15314,7 @@
       </p:sp>
       <p:sp>
         <p:nvSpPr>
-          <p:cNvPr id="33" name="Text 31"/>
+          <p:cNvPr id="34" name="Text 31"/>
           <p:cNvSpPr txBox="1"/>
           <p:nvPr/>
         </p:nvSpPr>
@@ -15139,7 +15355,7 @@
       </p:sp>
       <p:sp>
         <p:nvSpPr>
-          <p:cNvPr id="34" name="Text 32"/>
+          <p:cNvPr id="35" name="Text 32"/>
           <p:cNvSpPr txBox="1"/>
           <p:nvPr/>
         </p:nvSpPr>
@@ -15210,16 +15426,40 @@
           <a:chExt cx="0" cy="0"/>
         </a:xfrm>
       </p:grpSpPr>
-      <p:sp>
-        <p:nvSpPr>
-          <p:cNvPr id="2" name="Text 0"/>
+      <p:pic>
+        <p:nvPicPr>
+          <p:cNvPr id="2" name="Image 0" descr="preencoded.png">    </p:cNvPr>
+          <p:cNvPicPr>
+            <a:picLocks noChangeAspect="1"/>
+          </p:cNvPicPr>
+          <p:nvPr/>
+        </p:nvPicPr>
+        <p:blipFill>
+          <a:blip r:embed="rId1"/>
+          <a:stretch>
+            <a:fillRect/>
+          </a:stretch>
+        </p:blipFill>
+        <p:spPr>
+          <a:xfrm>
+            <a:off x="8211312" y="201168"/>
+            <a:ext cx="457200" cy="539496"/>
+          </a:xfrm>
+          <a:prstGeom prst="rect">
+            <a:avLst/>
+          </a:prstGeom>
+        </p:spPr>
+      </p:pic>
+      <p:sp>
+        <p:nvSpPr>
+          <p:cNvPr id="3" name="Text 0"/>
           <p:cNvSpPr txBox="1"/>
           <p:nvPr/>
         </p:nvSpPr>
         <p:spPr>
           <a:xfrm>
             <a:off x="457200" y="274320"/>
-            <a:ext cx="8229600" cy="548640"/>
+            <a:ext cx="7680960" cy="548640"/>
           </a:xfrm>
           <a:prstGeom prst="rect">
             <a:avLst/>
@@ -15245,7 +15485,7 @@
                 <a:ea typeface="游ゴシック" pitchFamily="34" charset="-122"/>
                 <a:cs typeface="游ゴシック" pitchFamily="34" charset="-120"/>
               </a:rPr>
-              <a:t>経緯：就業規則は平成26年に承認、給与規程は今回が初めて</a:t>
+              <a:t>経緯：給与規程の明文化は今回が初めて</a:t>
             </a:r>
             <a:endParaRPr lang="en-US" sz="2400" dirty="0"/>
           </a:p>
@@ -15253,7 +15493,7 @@
       </p:sp>
       <p:sp>
         <p:nvSpPr>
-          <p:cNvPr id="3" name="Text 1"/>
+          <p:cNvPr id="4" name="Text 1"/>
           <p:cNvSpPr txBox="1"/>
           <p:nvPr/>
         </p:nvSpPr>
@@ -15294,7 +15534,7 @@
       </p:sp>
       <p:sp>
         <p:nvSpPr>
-          <p:cNvPr id="4" name="Shape 2"/>
+          <p:cNvPr id="5" name="Shape 2"/>
           <p:cNvSpPr/>
           <p:nvPr/>
         </p:nvSpPr>
@@ -15317,7 +15557,7 @@
       </p:sp>
       <p:sp>
         <p:nvSpPr>
-          <p:cNvPr id="5" name="Shape 3"/>
+          <p:cNvPr id="6" name="Shape 3"/>
           <p:cNvSpPr/>
           <p:nvPr/>
         </p:nvSpPr>
@@ -15342,7 +15582,7 @@
       </p:sp>
       <p:sp>
         <p:nvSpPr>
-          <p:cNvPr id="6" name="Text 4"/>
+          <p:cNvPr id="7" name="Text 4"/>
           <p:cNvSpPr txBox="1"/>
           <p:nvPr/>
         </p:nvSpPr>
@@ -15383,7 +15623,7 @@
       </p:sp>
       <p:sp>
         <p:nvSpPr>
-          <p:cNvPr id="7" name="Text 5"/>
+          <p:cNvPr id="8" name="Text 5"/>
           <p:cNvSpPr txBox="1"/>
           <p:nvPr/>
         </p:nvSpPr>
@@ -15424,7 +15664,7 @@
       </p:sp>
       <p:sp>
         <p:nvSpPr>
-          <p:cNvPr id="8" name="Shape 6"/>
+          <p:cNvPr id="9" name="Shape 6"/>
           <p:cNvSpPr/>
           <p:nvPr/>
         </p:nvSpPr>
@@ -15451,7 +15691,7 @@
       </p:sp>
       <p:sp>
         <p:nvSpPr>
-          <p:cNvPr id="9" name="Text 7"/>
+          <p:cNvPr id="10" name="Text 7"/>
           <p:cNvSpPr txBox="1"/>
           <p:nvPr/>
         </p:nvSpPr>
@@ -15492,7 +15732,7 @@
       </p:sp>
       <p:sp>
         <p:nvSpPr>
-          <p:cNvPr id="10" name="Text 8"/>
+          <p:cNvPr id="11" name="Text 8"/>
           <p:cNvSpPr txBox="1"/>
           <p:nvPr/>
         </p:nvSpPr>
@@ -15533,7 +15773,7 @@
       </p:sp>
       <p:sp>
         <p:nvSpPr>
-          <p:cNvPr id="11" name="Shape 9"/>
+          <p:cNvPr id="12" name="Shape 9"/>
           <p:cNvSpPr/>
           <p:nvPr/>
         </p:nvSpPr>
@@ -15558,7 +15798,7 @@
       </p:sp>
       <p:sp>
         <p:nvSpPr>
-          <p:cNvPr id="12" name="Text 10"/>
+          <p:cNvPr id="13" name="Text 10"/>
           <p:cNvSpPr txBox="1"/>
           <p:nvPr/>
         </p:nvSpPr>
@@ -15599,7 +15839,7 @@
       </p:sp>
       <p:sp>
         <p:nvSpPr>
-          <p:cNvPr id="13" name="Text 11"/>
+          <p:cNvPr id="14" name="Text 11"/>
           <p:cNvSpPr txBox="1"/>
           <p:nvPr/>
         </p:nvSpPr>
@@ -15640,7 +15880,7 @@
       </p:sp>
       <p:sp>
         <p:nvSpPr>
-          <p:cNvPr id="14" name="Shape 12"/>
+          <p:cNvPr id="15" name="Shape 12"/>
           <p:cNvSpPr/>
           <p:nvPr/>
         </p:nvSpPr>
@@ -15667,7 +15907,7 @@
       </p:sp>
       <p:sp>
         <p:nvSpPr>
-          <p:cNvPr id="15" name="Text 13"/>
+          <p:cNvPr id="16" name="Text 13"/>
           <p:cNvSpPr txBox="1"/>
           <p:nvPr/>
         </p:nvSpPr>
@@ -15708,7 +15948,7 @@
       </p:sp>
       <p:sp>
         <p:nvSpPr>
-          <p:cNvPr id="16" name="Text 14"/>
+          <p:cNvPr id="17" name="Text 14"/>
           <p:cNvSpPr txBox="1"/>
           <p:nvPr/>
         </p:nvSpPr>
@@ -15749,7 +15989,7 @@
       </p:sp>
       <p:sp>
         <p:nvSpPr>
-          <p:cNvPr id="17" name="Shape 15"/>
+          <p:cNvPr id="18" name="Shape 15"/>
           <p:cNvSpPr/>
           <p:nvPr/>
         </p:nvSpPr>
@@ -15774,7 +16014,7 @@
       </p:sp>
       <p:sp>
         <p:nvSpPr>
-          <p:cNvPr id="18" name="Text 16"/>
+          <p:cNvPr id="19" name="Text 16"/>
           <p:cNvSpPr txBox="1"/>
           <p:nvPr/>
         </p:nvSpPr>
@@ -15815,7 +16055,7 @@
       </p:sp>
       <p:sp>
         <p:nvSpPr>
-          <p:cNvPr id="19" name="Text 17"/>
+          <p:cNvPr id="20" name="Text 17"/>
           <p:cNvSpPr txBox="1"/>
           <p:nvPr/>
         </p:nvSpPr>
@@ -15856,7 +16096,7 @@
       </p:sp>
       <p:sp>
         <p:nvSpPr>
-          <p:cNvPr id="20" name="Shape 18"/>
+          <p:cNvPr id="21" name="Shape 18"/>
           <p:cNvSpPr/>
           <p:nvPr/>
         </p:nvSpPr>
@@ -15883,7 +16123,7 @@
       </p:sp>
       <p:sp>
         <p:nvSpPr>
-          <p:cNvPr id="21" name="Text 19"/>
+          <p:cNvPr id="22" name="Text 19"/>
           <p:cNvSpPr txBox="1"/>
           <p:nvPr/>
         </p:nvSpPr>
@@ -15924,7 +16164,7 @@
       </p:sp>
       <p:sp>
         <p:nvSpPr>
-          <p:cNvPr id="22" name="Text 20"/>
+          <p:cNvPr id="23" name="Text 20"/>
           <p:cNvSpPr txBox="1"/>
           <p:nvPr/>
         </p:nvSpPr>
@@ -15965,7 +16205,7 @@
       </p:sp>
       <p:sp>
         <p:nvSpPr>
-          <p:cNvPr id="23" name="Shape 21"/>
+          <p:cNvPr id="24" name="Shape 21"/>
           <p:cNvSpPr/>
           <p:nvPr/>
         </p:nvSpPr>
@@ -15990,7 +16230,7 @@
       </p:sp>
       <p:sp>
         <p:nvSpPr>
-          <p:cNvPr id="24" name="Text 22"/>
+          <p:cNvPr id="25" name="Text 22"/>
           <p:cNvSpPr txBox="1"/>
           <p:nvPr/>
         </p:nvSpPr>
@@ -16031,7 +16271,7 @@
       </p:sp>
       <p:sp>
         <p:nvSpPr>
-          <p:cNvPr id="25" name="Text 23"/>
+          <p:cNvPr id="26" name="Text 23"/>
           <p:cNvSpPr txBox="1"/>
           <p:nvPr/>
         </p:nvSpPr>
@@ -16072,7 +16312,7 @@
       </p:sp>
       <p:sp>
         <p:nvSpPr>
-          <p:cNvPr id="26" name="Shape 24"/>
+          <p:cNvPr id="27" name="Shape 24"/>
           <p:cNvSpPr/>
           <p:nvPr/>
         </p:nvSpPr>
@@ -16099,7 +16339,7 @@
       </p:sp>
       <p:sp>
         <p:nvSpPr>
-          <p:cNvPr id="27" name="Text 25"/>
+          <p:cNvPr id="28" name="Text 25"/>
           <p:cNvSpPr txBox="1"/>
           <p:nvPr/>
         </p:nvSpPr>
@@ -16140,7 +16380,7 @@
       </p:sp>
       <p:sp>
         <p:nvSpPr>
-          <p:cNvPr id="28" name="Text 26"/>
+          <p:cNvPr id="29" name="Text 26"/>
           <p:cNvSpPr txBox="1"/>
           <p:nvPr/>
         </p:nvSpPr>
@@ -16181,7 +16421,7 @@
       </p:sp>
       <p:sp>
         <p:nvSpPr>
-          <p:cNvPr id="29" name="Text 27"/>
+          <p:cNvPr id="30" name="Text 27"/>
           <p:cNvSpPr txBox="1"/>
           <p:nvPr/>
         </p:nvSpPr>
@@ -16222,7 +16462,7 @@
       </p:sp>
       <p:sp>
         <p:nvSpPr>
-          <p:cNvPr id="30" name="Text 28"/>
+          <p:cNvPr id="31" name="Text 28"/>
           <p:cNvSpPr txBox="1"/>
           <p:nvPr/>
         </p:nvSpPr>
@@ -16293,16 +16533,40 @@
           <a:chExt cx="0" cy="0"/>
         </a:xfrm>
       </p:grpSpPr>
-      <p:sp>
-        <p:nvSpPr>
-          <p:cNvPr id="2" name="Text 0"/>
+      <p:pic>
+        <p:nvPicPr>
+          <p:cNvPr id="2" name="Image 0" descr="preencoded.png">    </p:cNvPr>
+          <p:cNvPicPr>
+            <a:picLocks noChangeAspect="1"/>
+          </p:cNvPicPr>
+          <p:nvPr/>
+        </p:nvPicPr>
+        <p:blipFill>
+          <a:blip r:embed="rId1"/>
+          <a:stretch>
+            <a:fillRect/>
+          </a:stretch>
+        </p:blipFill>
+        <p:spPr>
+          <a:xfrm>
+            <a:off x="8211312" y="201168"/>
+            <a:ext cx="457200" cy="539496"/>
+          </a:xfrm>
+          <a:prstGeom prst="rect">
+            <a:avLst/>
+          </a:prstGeom>
+        </p:spPr>
+      </p:pic>
+      <p:sp>
+        <p:nvSpPr>
+          <p:cNvPr id="3" name="Text 0"/>
           <p:cNvSpPr txBox="1"/>
           <p:nvPr/>
         </p:nvSpPr>
         <p:spPr>
           <a:xfrm>
             <a:off x="457200" y="274320"/>
-            <a:ext cx="8229600" cy="548640"/>
+            <a:ext cx="7680960" cy="548640"/>
           </a:xfrm>
           <a:prstGeom prst="rect">
             <a:avLst/>
@@ -16336,7 +16600,7 @@
       </p:sp>
       <p:sp>
         <p:nvSpPr>
-          <p:cNvPr id="3" name="Text 1"/>
+          <p:cNvPr id="4" name="Text 1"/>
           <p:cNvSpPr txBox="1"/>
           <p:nvPr/>
         </p:nvSpPr>
@@ -19149,7 +19413,7 @@
       </p:graphicFrame>
       <p:sp>
         <p:nvSpPr>
-          <p:cNvPr id="5" name="Text 2"/>
+          <p:cNvPr id="6" name="Text 2"/>
           <p:cNvSpPr txBox="1"/>
           <p:nvPr/>
         </p:nvSpPr>
@@ -19190,7 +19454,7 @@
       </p:sp>
       <p:sp>
         <p:nvSpPr>
-          <p:cNvPr id="6" name="Text 3"/>
+          <p:cNvPr id="7" name="Text 3"/>
           <p:cNvSpPr txBox="1"/>
           <p:nvPr/>
         </p:nvSpPr>
@@ -19261,16 +19525,40 @@
           <a:chExt cx="0" cy="0"/>
         </a:xfrm>
       </p:grpSpPr>
-      <p:sp>
-        <p:nvSpPr>
-          <p:cNvPr id="2" name="Text 0"/>
+      <p:pic>
+        <p:nvPicPr>
+          <p:cNvPr id="2" name="Image 0" descr="preencoded.png">    </p:cNvPr>
+          <p:cNvPicPr>
+            <a:picLocks noChangeAspect="1"/>
+          </p:cNvPicPr>
+          <p:nvPr/>
+        </p:nvPicPr>
+        <p:blipFill>
+          <a:blip r:embed="rId1"/>
+          <a:stretch>
+            <a:fillRect/>
+          </a:stretch>
+        </p:blipFill>
+        <p:spPr>
+          <a:xfrm>
+            <a:off x="8211312" y="201168"/>
+            <a:ext cx="457200" cy="539496"/>
+          </a:xfrm>
+          <a:prstGeom prst="rect">
+            <a:avLst/>
+          </a:prstGeom>
+        </p:spPr>
+      </p:pic>
+      <p:sp>
+        <p:nvSpPr>
+          <p:cNvPr id="3" name="Text 0"/>
           <p:cNvSpPr txBox="1"/>
           <p:nvPr/>
         </p:nvSpPr>
         <p:spPr>
           <a:xfrm>
             <a:off x="457200" y="274320"/>
-            <a:ext cx="8229600" cy="548640"/>
+            <a:ext cx="7680960" cy="548640"/>
           </a:xfrm>
           <a:prstGeom prst="rect">
             <a:avLst/>
@@ -19304,7 +19592,7 @@
       </p:sp>
       <p:sp>
         <p:nvSpPr>
-          <p:cNvPr id="3" name="Text 1"/>
+          <p:cNvPr id="4" name="Text 1"/>
           <p:cNvSpPr txBox="1"/>
           <p:nvPr/>
         </p:nvSpPr>
@@ -19345,7 +19633,7 @@
       </p:sp>
       <p:graphicFrame>
         <p:nvGraphicFramePr>
-          <p:cNvPr id="4" name="Chart 0" descr=""/>
+          <p:cNvPr id="5" name="Chart 0" descr=""/>
           <p:cNvGraphicFramePr/>
           <p:nvPr/>
         </p:nvGraphicFramePr>
@@ -19355,13 +19643,13 @@
         </p:xfrm>
         <a:graphic xmlns:a="http://schemas.openxmlformats.org/drawingml/2006/main">
           <a:graphicData uri="http://schemas.openxmlformats.org/drawingml/2006/chart">
-            <c:chart xmlns:c="http://schemas.openxmlformats.org/drawingml/2006/chart" r:id="rId1"/>
+            <c:chart xmlns:c="http://schemas.openxmlformats.org/drawingml/2006/chart" r:id="rId2"/>
           </a:graphicData>
         </a:graphic>
       </p:graphicFrame>
       <p:sp>
         <p:nvSpPr>
-          <p:cNvPr id="5" name="Shape 2"/>
+          <p:cNvPr id="6" name="Shape 2"/>
           <p:cNvSpPr/>
           <p:nvPr/>
         </p:nvSpPr>
@@ -19388,7 +19676,7 @@
       </p:sp>
       <p:sp>
         <p:nvSpPr>
-          <p:cNvPr id="6" name="Text 3"/>
+          <p:cNvPr id="7" name="Text 3"/>
           <p:cNvSpPr txBox="1"/>
           <p:nvPr/>
         </p:nvSpPr>
@@ -19429,7 +19717,7 @@
       </p:sp>
       <p:sp>
         <p:nvSpPr>
-          <p:cNvPr id="7" name="Text 4"/>
+          <p:cNvPr id="8" name="Text 4"/>
           <p:cNvSpPr txBox="1"/>
           <p:nvPr/>
         </p:nvSpPr>
@@ -19537,7 +19825,7 @@
       </p:sp>
       <p:sp>
         <p:nvSpPr>
-          <p:cNvPr id="8" name="Text 5"/>
+          <p:cNvPr id="9" name="Text 5"/>
           <p:cNvSpPr txBox="1"/>
           <p:nvPr/>
         </p:nvSpPr>
@@ -19578,7 +19866,7 @@
       </p:sp>
       <p:sp>
         <p:nvSpPr>
-          <p:cNvPr id="9" name="Text 6"/>
+          <p:cNvPr id="10" name="Text 6"/>
           <p:cNvSpPr txBox="1"/>
           <p:nvPr/>
         </p:nvSpPr>
@@ -19649,16 +19937,40 @@
           <a:chExt cx="0" cy="0"/>
         </a:xfrm>
       </p:grpSpPr>
-      <p:sp>
-        <p:nvSpPr>
-          <p:cNvPr id="2" name="Text 0"/>
+      <p:pic>
+        <p:nvPicPr>
+          <p:cNvPr id="2" name="Image 0" descr="preencoded.png">    </p:cNvPr>
+          <p:cNvPicPr>
+            <a:picLocks noChangeAspect="1"/>
+          </p:cNvPicPr>
+          <p:nvPr/>
+        </p:nvPicPr>
+        <p:blipFill>
+          <a:blip r:embed="rId1"/>
+          <a:stretch>
+            <a:fillRect/>
+          </a:stretch>
+        </p:blipFill>
+        <p:spPr>
+          <a:xfrm>
+            <a:off x="8211312" y="201168"/>
+            <a:ext cx="457200" cy="539496"/>
+          </a:xfrm>
+          <a:prstGeom prst="rect">
+            <a:avLst/>
+          </a:prstGeom>
+        </p:spPr>
+      </p:pic>
+      <p:sp>
+        <p:nvSpPr>
+          <p:cNvPr id="3" name="Text 0"/>
           <p:cNvSpPr txBox="1"/>
           <p:nvPr/>
         </p:nvSpPr>
         <p:spPr>
           <a:xfrm>
             <a:off x="457200" y="274320"/>
-            <a:ext cx="8229600" cy="548640"/>
+            <a:ext cx="7680960" cy="548640"/>
           </a:xfrm>
           <a:prstGeom prst="rect">
             <a:avLst/>
@@ -19692,7 +20004,7 @@
       </p:sp>
       <p:sp>
         <p:nvSpPr>
-          <p:cNvPr id="3" name="Text 1"/>
+          <p:cNvPr id="4" name="Text 1"/>
           <p:cNvSpPr txBox="1"/>
           <p:nvPr/>
         </p:nvSpPr>
@@ -19733,7 +20045,7 @@
       </p:sp>
       <p:sp>
         <p:nvSpPr>
-          <p:cNvPr id="4" name="Shape 2"/>
+          <p:cNvPr id="5" name="Shape 2"/>
           <p:cNvSpPr/>
           <p:nvPr/>
         </p:nvSpPr>
@@ -19760,7 +20072,7 @@
       </p:sp>
       <p:sp>
         <p:nvSpPr>
-          <p:cNvPr id="5" name="Text 3"/>
+          <p:cNvPr id="6" name="Text 3"/>
           <p:cNvSpPr txBox="1"/>
           <p:nvPr/>
         </p:nvSpPr>
@@ -19801,7 +20113,7 @@
       </p:sp>
       <p:graphicFrame>
         <p:nvGraphicFramePr>
-          <p:cNvPr id="6" name="Chart 0" descr=""/>
+          <p:cNvPr id="7" name="Chart 0" descr=""/>
           <p:cNvGraphicFramePr/>
           <p:nvPr/>
         </p:nvGraphicFramePr>
@@ -19811,13 +20123,13 @@
         </p:xfrm>
         <a:graphic xmlns:a="http://schemas.openxmlformats.org/drawingml/2006/main">
           <a:graphicData uri="http://schemas.openxmlformats.org/drawingml/2006/chart">
-            <c:chart xmlns:c="http://schemas.openxmlformats.org/drawingml/2006/chart" r:id="rId1"/>
+            <c:chart xmlns:c="http://schemas.openxmlformats.org/drawingml/2006/chart" r:id="rId2"/>
           </a:graphicData>
         </a:graphic>
       </p:graphicFrame>
       <p:sp>
         <p:nvSpPr>
-          <p:cNvPr id="7" name="Text 4"/>
+          <p:cNvPr id="8" name="Text 4"/>
           <p:cNvSpPr txBox="1"/>
           <p:nvPr/>
         </p:nvSpPr>
@@ -19925,7 +20237,7 @@
       </p:sp>
       <p:sp>
         <p:nvSpPr>
-          <p:cNvPr id="8" name="Shape 5"/>
+          <p:cNvPr id="9" name="Shape 5"/>
           <p:cNvSpPr/>
           <p:nvPr/>
         </p:nvSpPr>
@@ -19952,7 +20264,7 @@
       </p:sp>
       <p:sp>
         <p:nvSpPr>
-          <p:cNvPr id="9" name="Text 6"/>
+          <p:cNvPr id="10" name="Text 6"/>
           <p:cNvSpPr txBox="1"/>
           <p:nvPr/>
         </p:nvSpPr>
@@ -21672,7 +21984,7 @@
       </p:graphicFrame>
       <p:sp>
         <p:nvSpPr>
-          <p:cNvPr id="11" name="Text 7"/>
+          <p:cNvPr id="12" name="Text 7"/>
           <p:cNvSpPr txBox="1"/>
           <p:nvPr/>
         </p:nvSpPr>
@@ -21713,7 +22025,7 @@
       </p:sp>
       <p:sp>
         <p:nvSpPr>
-          <p:cNvPr id="12" name="Text 8"/>
+          <p:cNvPr id="13" name="Text 8"/>
           <p:cNvSpPr txBox="1"/>
           <p:nvPr/>
         </p:nvSpPr>
@@ -21754,7 +22066,7 @@
       </p:sp>
       <p:sp>
         <p:nvSpPr>
-          <p:cNvPr id="13" name="Text 9"/>
+          <p:cNvPr id="14" name="Text 9"/>
           <p:cNvSpPr txBox="1"/>
           <p:nvPr/>
         </p:nvSpPr>
@@ -21825,16 +22137,40 @@
           <a:chExt cx="0" cy="0"/>
         </a:xfrm>
       </p:grpSpPr>
-      <p:sp>
-        <p:nvSpPr>
-          <p:cNvPr id="2" name="Text 0"/>
+      <p:pic>
+        <p:nvPicPr>
+          <p:cNvPr id="2" name="Image 0" descr="preencoded.png">    </p:cNvPr>
+          <p:cNvPicPr>
+            <a:picLocks noChangeAspect="1"/>
+          </p:cNvPicPr>
+          <p:nvPr/>
+        </p:nvPicPr>
+        <p:blipFill>
+          <a:blip r:embed="rId1"/>
+          <a:stretch>
+            <a:fillRect/>
+          </a:stretch>
+        </p:blipFill>
+        <p:spPr>
+          <a:xfrm>
+            <a:off x="8211312" y="201168"/>
+            <a:ext cx="457200" cy="539496"/>
+          </a:xfrm>
+          <a:prstGeom prst="rect">
+            <a:avLst/>
+          </a:prstGeom>
+        </p:spPr>
+      </p:pic>
+      <p:sp>
+        <p:nvSpPr>
+          <p:cNvPr id="3" name="Text 0"/>
           <p:cNvSpPr txBox="1"/>
           <p:nvPr/>
         </p:nvSpPr>
         <p:spPr>
           <a:xfrm>
             <a:off x="457200" y="274320"/>
-            <a:ext cx="8229600" cy="548640"/>
+            <a:ext cx="7680960" cy="548640"/>
           </a:xfrm>
           <a:prstGeom prst="rect">
             <a:avLst/>
@@ -21868,7 +22204,7 @@
       </p:sp>
       <p:sp>
         <p:nvSpPr>
-          <p:cNvPr id="3" name="Text 1"/>
+          <p:cNvPr id="4" name="Text 1"/>
           <p:cNvSpPr txBox="1"/>
           <p:nvPr/>
         </p:nvSpPr>
@@ -23993,7 +24329,7 @@
       </p:graphicFrame>
       <p:graphicFrame>
         <p:nvGraphicFramePr>
-          <p:cNvPr id="5" name="Chart 0" descr=""/>
+          <p:cNvPr id="6" name="Chart 0" descr=""/>
           <p:cNvGraphicFramePr/>
           <p:nvPr/>
         </p:nvGraphicFramePr>
@@ -24003,13 +24339,13 @@
         </p:xfrm>
         <a:graphic xmlns:a="http://schemas.openxmlformats.org/drawingml/2006/main">
           <a:graphicData uri="http://schemas.openxmlformats.org/drawingml/2006/chart">
-            <c:chart xmlns:c="http://schemas.openxmlformats.org/drawingml/2006/chart" r:id="rId1"/>
+            <c:chart xmlns:c="http://schemas.openxmlformats.org/drawingml/2006/chart" r:id="rId2"/>
           </a:graphicData>
         </a:graphic>
       </p:graphicFrame>
       <p:sp>
         <p:nvSpPr>
-          <p:cNvPr id="6" name="Shape 2"/>
+          <p:cNvPr id="7" name="Shape 2"/>
           <p:cNvSpPr/>
           <p:nvPr/>
         </p:nvSpPr>
@@ -24036,7 +24372,7 @@
       </p:sp>
       <p:sp>
         <p:nvSpPr>
-          <p:cNvPr id="7" name="Text 3"/>
+          <p:cNvPr id="8" name="Text 3"/>
           <p:cNvSpPr txBox="1"/>
           <p:nvPr/>
         </p:nvSpPr>
@@ -24144,7 +24480,7 @@
       </p:sp>
       <p:sp>
         <p:nvSpPr>
-          <p:cNvPr id="8" name="Text 4"/>
+          <p:cNvPr id="9" name="Text 4"/>
           <p:cNvSpPr txBox="1"/>
           <p:nvPr/>
         </p:nvSpPr>
@@ -24185,7 +24521,7 @@
       </p:sp>
       <p:sp>
         <p:nvSpPr>
-          <p:cNvPr id="9" name="Text 5"/>
+          <p:cNvPr id="10" name="Text 5"/>
           <p:cNvSpPr txBox="1"/>
           <p:nvPr/>
         </p:nvSpPr>
@@ -24256,16 +24592,40 @@
           <a:chExt cx="0" cy="0"/>
         </a:xfrm>
       </p:grpSpPr>
-      <p:sp>
-        <p:nvSpPr>
-          <p:cNvPr id="2" name="Text 0"/>
+      <p:pic>
+        <p:nvPicPr>
+          <p:cNvPr id="2" name="Image 0" descr="preencoded.png">    </p:cNvPr>
+          <p:cNvPicPr>
+            <a:picLocks noChangeAspect="1"/>
+          </p:cNvPicPr>
+          <p:nvPr/>
+        </p:nvPicPr>
+        <p:blipFill>
+          <a:blip r:embed="rId1"/>
+          <a:stretch>
+            <a:fillRect/>
+          </a:stretch>
+        </p:blipFill>
+        <p:spPr>
+          <a:xfrm>
+            <a:off x="8211312" y="201168"/>
+            <a:ext cx="457200" cy="539496"/>
+          </a:xfrm>
+          <a:prstGeom prst="rect">
+            <a:avLst/>
+          </a:prstGeom>
+        </p:spPr>
+      </p:pic>
+      <p:sp>
+        <p:nvSpPr>
+          <p:cNvPr id="3" name="Text 0"/>
           <p:cNvSpPr txBox="1"/>
           <p:nvPr/>
         </p:nvSpPr>
         <p:spPr>
           <a:xfrm>
             <a:off x="457200" y="274320"/>
-            <a:ext cx="8229600" cy="548640"/>
+            <a:ext cx="7680960" cy="548640"/>
           </a:xfrm>
           <a:prstGeom prst="rect">
             <a:avLst/>
@@ -24299,7 +24659,7 @@
       </p:sp>
       <p:sp>
         <p:nvSpPr>
-          <p:cNvPr id="3" name="Text 1"/>
+          <p:cNvPr id="4" name="Text 1"/>
           <p:cNvSpPr txBox="1"/>
           <p:nvPr/>
         </p:nvSpPr>
@@ -24340,7 +24700,7 @@
       </p:sp>
       <p:graphicFrame>
         <p:nvGraphicFramePr>
-          <p:cNvPr id="4" name="Chart 0" descr=""/>
+          <p:cNvPr id="5" name="Chart 0" descr=""/>
           <p:cNvGraphicFramePr/>
           <p:nvPr/>
         </p:nvGraphicFramePr>
@@ -24350,13 +24710,13 @@
         </p:xfrm>
         <a:graphic xmlns:a="http://schemas.openxmlformats.org/drawingml/2006/main">
           <a:graphicData uri="http://schemas.openxmlformats.org/drawingml/2006/chart">
-            <c:chart xmlns:c="http://schemas.openxmlformats.org/drawingml/2006/chart" r:id="rId1"/>
+            <c:chart xmlns:c="http://schemas.openxmlformats.org/drawingml/2006/chart" r:id="rId2"/>
           </a:graphicData>
         </a:graphic>
       </p:graphicFrame>
       <p:sp>
         <p:nvSpPr>
-          <p:cNvPr id="5" name="Shape 2"/>
+          <p:cNvPr id="6" name="Shape 2"/>
           <p:cNvSpPr/>
           <p:nvPr/>
         </p:nvSpPr>
@@ -24383,7 +24743,7 @@
       </p:sp>
       <p:sp>
         <p:nvSpPr>
-          <p:cNvPr id="6" name="Text 3"/>
+          <p:cNvPr id="7" name="Text 3"/>
           <p:cNvSpPr txBox="1"/>
           <p:nvPr/>
         </p:nvSpPr>
@@ -24424,7 +24784,7 @@
       </p:sp>
       <p:sp>
         <p:nvSpPr>
-          <p:cNvPr id="7" name="Text 4"/>
+          <p:cNvPr id="8" name="Text 4"/>
           <p:cNvSpPr txBox="1"/>
           <p:nvPr/>
         </p:nvSpPr>
@@ -24532,7 +24892,7 @@
       </p:sp>
       <p:sp>
         <p:nvSpPr>
-          <p:cNvPr id="8" name="Text 5"/>
+          <p:cNvPr id="9" name="Text 5"/>
           <p:cNvSpPr txBox="1"/>
           <p:nvPr/>
         </p:nvSpPr>
@@ -24573,7 +24933,7 @@
       </p:sp>
       <p:sp>
         <p:nvSpPr>
-          <p:cNvPr id="9" name="Text 6"/>
+          <p:cNvPr id="10" name="Text 6"/>
           <p:cNvSpPr txBox="1"/>
           <p:nvPr/>
         </p:nvSpPr>
